--- a/projects/WaferEngine-staging/meetings/2026-08-02.pptx
+++ b/projects/WaferEngine-staging/meetings/2026-08-02.pptx
@@ -24,6 +24,7 @@
     <p:sldId id="268" r:id="rId15"/>
     <p:sldId id="269" r:id="rId16"/>
     <p:sldId id="270" r:id="rId17"/>
+    <p:sldId id="272" r:id="rId23"/>
   </p:sldIdLst>
   <p:sldSz cx="18288000" cy="10287000"/>
   <p:notesSz cx="10287000" cy="18288000"/>
@@ -515,7 +516,7 @@
           <a:lstStyle/>
           <a:p>
             <a:r>
-              <a:t>The two resident-prefix compute measurements were byte-identical across cold/warm and warm/warm checks. Exact pdSeparate lacks START_CHUNKS, so this is a validated screening result, not the final pdSeparate benchmark.</a:t>
+              <a:t>Lane B reloads the complete target KV and resumes with normal free decode. Lane C remains a screening composition based on direct S6a prefill compute plus E5/E6 transport evidence; exact pdSeparate lacks START_CHUNKS.</a:t>
             </a:r>
           </a:p>
         </p:txBody>
@@ -608,6 +609,52 @@
           <a:p>
             <a:r>
               <a:t>E12b prefill ingress is gated: transport work alone cannot remove the measured S6a compute floor.</a:t>
+            </a:r>
+          </a:p>
+        </p:txBody>
+      </p:sp>
+    </p:spTree>
+  </p:cSld>
+  <p:clrMapOvr>
+    <a:masterClrMapping/>
+  </p:clrMapOvr>
+</p:notes>
+</file>
+
+<file path=ppt/notesSlides/notesSlide17.xml><?xml version="1.0" encoding="utf-8"?>
+<p:notes xmlns:a="http://schemas.openxmlformats.org/drawingml/2006/main" xmlns:p="http://schemas.openxmlformats.org/presentationml/2006/main" xmlns:r="http://schemas.openxmlformats.org/officeDocument/2006/relationships">
+  <p:cSld>
+    <p:spTree>
+      <p:nvGrpSpPr>
+        <p:cNvPr id="1" name=""/>
+        <p:cNvGrpSpPr/>
+        <p:nvPr/>
+      </p:nvGrpSpPr>
+      <p:grpSpPr>
+        <a:xfrm>
+          <a:off x="0" y="0"/>
+          <a:ext cx="0" cy="0"/>
+          <a:chOff x="0" y="0"/>
+          <a:chExt cx="0" cy="0"/>
+        </a:xfrm>
+      </p:grpSpPr>
+      <p:sp>
+        <p:nvSpPr>
+          <p:cNvPr id="2" name="Notes Placeholder"/>
+          <p:cNvSpPr>
+            <a:spLocks noGrp="1"/>
+          </p:cNvSpPr>
+          <p:nvPr>
+            <p:ph type="body" idx="1"/>
+          </p:nvPr>
+        </p:nvSpPr>
+        <p:spPr/>
+        <p:txBody>
+          <a:bodyPr/>
+          <a:lstStyle/>
+          <a:p>
+            <a:r>
+              <a:t>M2 is condensed into one closeout line. The authoritative M1 milestone marks S0 and S1 complete; its remaining dependency chain is S2 to S3 to S4 to S5. The partial-hit open question is resolved by the S3 take-over default, while exact SRAM sizing is part of S4.</a:t>
             </a:r>
           </a:p>
         </p:txBody>
@@ -2717,7 +2764,7 @@
                 </a:solidFill>
                 <a:latin typeface="Arial"/>
               </a:rPr>
-              <a:t>MEASURED + DERIVED — direct S6a prefill compute at total context 8,192; forced and lane totals combine E9/E5/E6 evidence.</a:t>
+              <a:t>Lane B: full-KV reload = 338.266 ms in both cases; forced delta and common free-decode excluded.</a:t>
             </a:r>
           </a:p>
         </p:txBody>
@@ -5168,6 +5215,712 @@
                 <a:latin typeface="Arial"/>
               </a:rPr>
               <a:t>Decide whether full eviction round-trip latency is required for the policy claim.</a:t>
+            </a:r>
+          </a:p>
+        </p:txBody>
+      </p:sp>
+    </p:spTree>
+  </p:cSld>
+  <p:clrMapOvr>
+    <a:masterClrMapping/>
+  </p:clrMapOvr>
+</p:sld>
+</file>
+
+<file path=ppt/slides/slide17.xml><?xml version="1.0" encoding="utf-8"?>
+<p:sld xmlns:a="http://schemas.openxmlformats.org/drawingml/2006/main" xmlns:p="http://schemas.openxmlformats.org/presentationml/2006/main" xmlns:r="http://schemas.openxmlformats.org/officeDocument/2006/relationships">
+  <p:cSld>
+    <p:spTree>
+      <p:nvGrpSpPr>
+        <p:cNvPr id="1" name=""/>
+        <p:cNvGrpSpPr/>
+        <p:nvPr/>
+      </p:nvGrpSpPr>
+      <p:grpSpPr/>
+      <p:sp>
+        <p:nvSpPr>
+          <p:cNvPr id="2" name="TextBox 1"/>
+          <p:cNvSpPr txBox="1"/>
+          <p:nvPr/>
+        </p:nvSpPr>
+        <p:spPr>
+          <a:xfrm>
+            <a:off x="987552" y="914400"/>
+            <a:ext cx="16312896" cy="301752"/>
+          </a:xfrm>
+          <a:prstGeom prst="rect">
+            <a:avLst/>
+          </a:prstGeom>
+          <a:noFill/>
+        </p:spPr>
+        <p:txBody>
+          <a:bodyPr wrap="square" lIns="0" rIns="0" tIns="0" bIns="0" anchor="t">
+            <a:spAutoFit/>
+          </a:bodyPr>
+          <a:lstStyle/>
+          <a:p>
+            <a:pPr algn="l">
+              <a:lnSpc>
+                <a:spcPct val="132000"/>
+              </a:lnSpc>
+            </a:pPr>
+            <a:r>
+              <a:rPr sz="1800" b="0" u="none" i="0" spc="150">
+                <a:solidFill>
+                  <a:srgbClr val="A1A1AA"/>
+                </a:solidFill>
+                <a:latin typeface="Arial"/>
+              </a:rPr>
+              <a:t>MILESTONE CURSOR</a:t>
+            </a:r>
+          </a:p>
+        </p:txBody>
+      </p:sp>
+      <p:sp>
+        <p:nvSpPr>
+          <p:cNvPr id="3" name="TextBox 2"/>
+          <p:cNvSpPr txBox="1"/>
+          <p:nvPr/>
+        </p:nvSpPr>
+        <p:spPr>
+          <a:xfrm>
+            <a:off x="987552" y="1371600"/>
+            <a:ext cx="16312896" cy="674369"/>
+          </a:xfrm>
+          <a:prstGeom prst="rect">
+            <a:avLst/>
+          </a:prstGeom>
+          <a:noFill/>
+        </p:spPr>
+        <p:txBody>
+          <a:bodyPr wrap="square" lIns="0" rIns="0" tIns="0" bIns="0" anchor="t">
+            <a:spAutoFit/>
+          </a:bodyPr>
+          <a:lstStyle/>
+          <a:p>
+            <a:pPr algn="l">
+              <a:lnSpc>
+                <a:spcPct val="118000"/>
+              </a:lnSpc>
+            </a:pPr>
+            <a:r>
+              <a:rPr sz="4500" b="0" u="none" i="0">
+                <a:solidFill>
+                  <a:srgbClr val="18181B"/>
+                </a:solidFill>
+                <a:latin typeface="Arial"/>
+              </a:rPr>
+              <a:t>Finish M2, then resume M1 from S2</a:t>
+            </a:r>
+          </a:p>
+        </p:txBody>
+      </p:sp>
+      <p:sp>
+        <p:nvSpPr>
+          <p:cNvPr id="4" name="rule"/>
+          <p:cNvSpPr/>
+          <p:nvPr/>
+        </p:nvSpPr>
+        <p:spPr>
+          <a:xfrm>
+            <a:off x="987552" y="2484882"/>
+            <a:ext cx="14282928" cy="10972"/>
+          </a:xfrm>
+          <a:prstGeom prst="rect">
+            <a:avLst/>
+          </a:prstGeom>
+          <a:solidFill>
+            <a:srgbClr val="E4E4E7"/>
+          </a:solidFill>
+          <a:ln>
+            <a:noFill/>
+          </a:ln>
+          <a:effectLst/>
+        </p:spPr>
+        <p:style>
+          <a:lnRef idx="1">
+            <a:schemeClr val="accent1"/>
+          </a:lnRef>
+          <a:fillRef idx="3">
+            <a:schemeClr val="accent1"/>
+          </a:fillRef>
+          <a:effectRef idx="2">
+            <a:schemeClr val="accent1"/>
+          </a:effectRef>
+          <a:fontRef idx="minor">
+            <a:schemeClr val="lt1"/>
+          </a:fontRef>
+        </p:style>
+        <p:txBody>
+          <a:bodyPr rtlCol="0" anchor="ctr"/>
+          <a:lstStyle/>
+          <a:p>
+            <a:pPr algn="ctr"/>
+          </a:p>
+        </p:txBody>
+      </p:sp>
+      <p:sp>
+        <p:nvSpPr>
+          <p:cNvPr id="5" name="TextBox 4"/>
+          <p:cNvSpPr txBox="1"/>
+          <p:nvPr/>
+        </p:nvSpPr>
+        <p:spPr>
+          <a:xfrm>
+            <a:off x="987552" y="2740913"/>
+            <a:ext cx="2093976" cy="326898"/>
+          </a:xfrm>
+          <a:prstGeom prst="rect">
+            <a:avLst/>
+          </a:prstGeom>
+          <a:noFill/>
+        </p:spPr>
+        <p:txBody>
+          <a:bodyPr wrap="square" lIns="0" rIns="0" tIns="0" bIns="0" anchor="t">
+            <a:spAutoFit/>
+          </a:bodyPr>
+          <a:lstStyle/>
+          <a:p>
+            <a:pPr algn="l">
+              <a:lnSpc>
+                <a:spcPct val="132000"/>
+              </a:lnSpc>
+            </a:pPr>
+            <a:r>
+              <a:rPr sz="1950" b="0" u="none" i="0">
+                <a:solidFill>
+                  <a:srgbClr val="A1A1AA"/>
+                </a:solidFill>
+                <a:latin typeface="Arial"/>
+              </a:rPr>
+              <a:t>M2 · CLOSE</a:t>
+            </a:r>
+          </a:p>
+        </p:txBody>
+      </p:sp>
+      <p:sp>
+        <p:nvSpPr>
+          <p:cNvPr id="6" name="TextBox 5"/>
+          <p:cNvSpPr txBox="1"/>
+          <p:nvPr/>
+        </p:nvSpPr>
+        <p:spPr>
+          <a:xfrm>
+            <a:off x="3200400" y="2704337"/>
+            <a:ext cx="10972800" cy="402336"/>
+          </a:xfrm>
+          <a:prstGeom prst="rect">
+            <a:avLst/>
+          </a:prstGeom>
+          <a:noFill/>
+        </p:spPr>
+        <p:txBody>
+          <a:bodyPr wrap="square" lIns="0" rIns="0" tIns="0" bIns="0" anchor="t">
+            <a:spAutoFit/>
+          </a:bodyPr>
+          <a:lstStyle/>
+          <a:p>
+            <a:pPr algn="l">
+              <a:lnSpc>
+                <a:spcPct val="132000"/>
+              </a:lnSpc>
+            </a:pPr>
+            <a:r>
+              <a:rPr sz="2400" b="0" u="none" i="0">
+                <a:solidFill>
+                  <a:srgbClr val="18181B"/>
+                </a:solidFill>
+                <a:latin typeface="Arial"/>
+              </a:rPr>
+              <a:t>Reconcile Lane B; close E14/E11 and conditional E13; keep E12 gated.</a:t>
+            </a:r>
+          </a:p>
+        </p:txBody>
+      </p:sp>
+      <p:sp>
+        <p:nvSpPr>
+          <p:cNvPr id="7" name="rule"/>
+          <p:cNvSpPr/>
+          <p:nvPr/>
+        </p:nvSpPr>
+        <p:spPr>
+          <a:xfrm>
+            <a:off x="987552" y="3316986"/>
+            <a:ext cx="14282928" cy="10972"/>
+          </a:xfrm>
+          <a:prstGeom prst="rect">
+            <a:avLst/>
+          </a:prstGeom>
+          <a:solidFill>
+            <a:srgbClr val="E4E4E7"/>
+          </a:solidFill>
+          <a:ln>
+            <a:noFill/>
+          </a:ln>
+          <a:effectLst/>
+        </p:spPr>
+        <p:style>
+          <a:lnRef idx="1">
+            <a:schemeClr val="accent1"/>
+          </a:lnRef>
+          <a:fillRef idx="3">
+            <a:schemeClr val="accent1"/>
+          </a:fillRef>
+          <a:effectRef idx="2">
+            <a:schemeClr val="accent1"/>
+          </a:effectRef>
+          <a:fontRef idx="minor">
+            <a:schemeClr val="lt1"/>
+          </a:fontRef>
+        </p:style>
+        <p:txBody>
+          <a:bodyPr rtlCol="0" anchor="ctr"/>
+          <a:lstStyle/>
+          <a:p>
+            <a:pPr algn="ctr"/>
+          </a:p>
+        </p:txBody>
+      </p:sp>
+      <p:sp>
+        <p:nvSpPr>
+          <p:cNvPr id="8" name="TextBox 7"/>
+          <p:cNvSpPr txBox="1"/>
+          <p:nvPr/>
+        </p:nvSpPr>
+        <p:spPr>
+          <a:xfrm>
+            <a:off x="987552" y="3573018"/>
+            <a:ext cx="2093976" cy="326898"/>
+          </a:xfrm>
+          <a:prstGeom prst="rect">
+            <a:avLst/>
+          </a:prstGeom>
+          <a:noFill/>
+        </p:spPr>
+        <p:txBody>
+          <a:bodyPr wrap="square" lIns="0" rIns="0" tIns="0" bIns="0" anchor="t">
+            <a:spAutoFit/>
+          </a:bodyPr>
+          <a:lstStyle/>
+          <a:p>
+            <a:pPr algn="l">
+              <a:lnSpc>
+                <a:spcPct val="132000"/>
+              </a:lnSpc>
+            </a:pPr>
+            <a:r>
+              <a:rPr sz="1950" b="0" u="none" i="0">
+                <a:solidFill>
+                  <a:srgbClr val="A1A1AA"/>
+                </a:solidFill>
+                <a:latin typeface="Arial"/>
+              </a:rPr>
+              <a:t>M1 · S2 NEXT</a:t>
+            </a:r>
+          </a:p>
+        </p:txBody>
+      </p:sp>
+      <p:sp>
+        <p:nvSpPr>
+          <p:cNvPr id="9" name="TextBox 8"/>
+          <p:cNvSpPr txBox="1"/>
+          <p:nvPr/>
+        </p:nvSpPr>
+        <p:spPr>
+          <a:xfrm>
+            <a:off x="3200400" y="3536441"/>
+            <a:ext cx="10972800" cy="402336"/>
+          </a:xfrm>
+          <a:prstGeom prst="rect">
+            <a:avLst/>
+          </a:prstGeom>
+          <a:noFill/>
+        </p:spPr>
+        <p:txBody>
+          <a:bodyPr wrap="square" lIns="0" rIns="0" tIns="0" bIns="0" anchor="t">
+            <a:spAutoFit/>
+          </a:bodyPr>
+          <a:lstStyle/>
+          <a:p>
+            <a:pPr algn="l">
+              <a:lnSpc>
+                <a:spcPct val="132000"/>
+              </a:lnSpc>
+            </a:pPr>
+            <a:r>
+              <a:rPr sz="2400" b="0" u="none" i="0">
+                <a:solidFill>
+                  <a:srgbClr val="18181B"/>
+                </a:solidFill>
+                <a:latin typeface="Arial"/>
+              </a:rPr>
+              <a:t>Track per-slot valid_len and verify retention as active slots change.</a:t>
+            </a:r>
+          </a:p>
+        </p:txBody>
+      </p:sp>
+      <p:sp>
+        <p:nvSpPr>
+          <p:cNvPr id="10" name="rule"/>
+          <p:cNvSpPr/>
+          <p:nvPr/>
+        </p:nvSpPr>
+        <p:spPr>
+          <a:xfrm>
+            <a:off x="987552" y="4149089"/>
+            <a:ext cx="14282928" cy="10972"/>
+          </a:xfrm>
+          <a:prstGeom prst="rect">
+            <a:avLst/>
+          </a:prstGeom>
+          <a:solidFill>
+            <a:srgbClr val="E4E4E7"/>
+          </a:solidFill>
+          <a:ln>
+            <a:noFill/>
+          </a:ln>
+          <a:effectLst/>
+        </p:spPr>
+        <p:style>
+          <a:lnRef idx="1">
+            <a:schemeClr val="accent1"/>
+          </a:lnRef>
+          <a:fillRef idx="3">
+            <a:schemeClr val="accent1"/>
+          </a:fillRef>
+          <a:effectRef idx="2">
+            <a:schemeClr val="accent1"/>
+          </a:effectRef>
+          <a:fontRef idx="minor">
+            <a:schemeClr val="lt1"/>
+          </a:fontRef>
+        </p:style>
+        <p:txBody>
+          <a:bodyPr rtlCol="0" anchor="ctr"/>
+          <a:lstStyle/>
+          <a:p>
+            <a:pPr algn="ctr"/>
+          </a:p>
+        </p:txBody>
+      </p:sp>
+      <p:sp>
+        <p:nvSpPr>
+          <p:cNvPr id="11" name="TextBox 10"/>
+          <p:cNvSpPr txBox="1"/>
+          <p:nvPr/>
+        </p:nvSpPr>
+        <p:spPr>
+          <a:xfrm>
+            <a:off x="987552" y="4405122"/>
+            <a:ext cx="2093976" cy="326898"/>
+          </a:xfrm>
+          <a:prstGeom prst="rect">
+            <a:avLst/>
+          </a:prstGeom>
+          <a:noFill/>
+        </p:spPr>
+        <p:txBody>
+          <a:bodyPr wrap="square" lIns="0" rIns="0" tIns="0" bIns="0" anchor="t">
+            <a:spAutoFit/>
+          </a:bodyPr>
+          <a:lstStyle/>
+          <a:p>
+            <a:pPr algn="l">
+              <a:lnSpc>
+                <a:spcPct val="132000"/>
+              </a:lnSpc>
+            </a:pPr>
+            <a:r>
+              <a:rPr sz="1950" b="0" u="none" i="0">
+                <a:solidFill>
+                  <a:srgbClr val="A1A1AA"/>
+                </a:solidFill>
+                <a:latin typeface="Arial"/>
+              </a:rPr>
+              <a:t>M1 · S3</a:t>
+            </a:r>
+          </a:p>
+        </p:txBody>
+      </p:sp>
+      <p:sp>
+        <p:nvSpPr>
+          <p:cNvPr id="12" name="TextBox 11"/>
+          <p:cNvSpPr txBox="1"/>
+          <p:nvPr/>
+        </p:nvSpPr>
+        <p:spPr>
+          <a:xfrm>
+            <a:off x="3200400" y="4368546"/>
+            <a:ext cx="10972800" cy="402336"/>
+          </a:xfrm>
+          <a:prstGeom prst="rect">
+            <a:avLst/>
+          </a:prstGeom>
+          <a:noFill/>
+        </p:spPr>
+        <p:txBody>
+          <a:bodyPr wrap="square" lIns="0" rIns="0" tIns="0" bIns="0" anchor="t">
+            <a:spAutoFit/>
+          </a:bodyPr>
+          <a:lstStyle/>
+          <a:p>
+            <a:pPr algn="l">
+              <a:lnSpc>
+                <a:spcPct val="132000"/>
+              </a:lnSpc>
+            </a:pPr>
+            <a:r>
+              <a:rPr sz="2400" b="0" u="none" i="0">
+                <a:solidFill>
+                  <a:srgbClr val="18181B"/>
+                </a:solidFill>
+                <a:latin typeface="Arial"/>
+              </a:rPr>
+              <a:t>Implement prefix hits, skip-prefill, LRU replace, miss rebuild, and truncation.</a:t>
+            </a:r>
+          </a:p>
+        </p:txBody>
+      </p:sp>
+      <p:sp>
+        <p:nvSpPr>
+          <p:cNvPr id="13" name="rule"/>
+          <p:cNvSpPr/>
+          <p:nvPr/>
+        </p:nvSpPr>
+        <p:spPr>
+          <a:xfrm>
+            <a:off x="987552" y="4981194"/>
+            <a:ext cx="14282928" cy="10972"/>
+          </a:xfrm>
+          <a:prstGeom prst="rect">
+            <a:avLst/>
+          </a:prstGeom>
+          <a:solidFill>
+            <a:srgbClr val="E4E4E7"/>
+          </a:solidFill>
+          <a:ln>
+            <a:noFill/>
+          </a:ln>
+          <a:effectLst/>
+        </p:spPr>
+        <p:style>
+          <a:lnRef idx="1">
+            <a:schemeClr val="accent1"/>
+          </a:lnRef>
+          <a:fillRef idx="3">
+            <a:schemeClr val="accent1"/>
+          </a:fillRef>
+          <a:effectRef idx="2">
+            <a:schemeClr val="accent1"/>
+          </a:effectRef>
+          <a:fontRef idx="minor">
+            <a:schemeClr val="lt1"/>
+          </a:fontRef>
+        </p:style>
+        <p:txBody>
+          <a:bodyPr rtlCol="0" anchor="ctr"/>
+          <a:lstStyle/>
+          <a:p>
+            <a:pPr algn="ctr"/>
+          </a:p>
+        </p:txBody>
+      </p:sp>
+      <p:sp>
+        <p:nvSpPr>
+          <p:cNvPr id="14" name="TextBox 13"/>
+          <p:cNvSpPr txBox="1"/>
+          <p:nvPr/>
+        </p:nvSpPr>
+        <p:spPr>
+          <a:xfrm>
+            <a:off x="987552" y="5237226"/>
+            <a:ext cx="2093976" cy="326898"/>
+          </a:xfrm>
+          <a:prstGeom prst="rect">
+            <a:avLst/>
+          </a:prstGeom>
+          <a:noFill/>
+        </p:spPr>
+        <p:txBody>
+          <a:bodyPr wrap="square" lIns="0" rIns="0" tIns="0" bIns="0" anchor="t">
+            <a:spAutoFit/>
+          </a:bodyPr>
+          <a:lstStyle/>
+          <a:p>
+            <a:pPr algn="l">
+              <a:lnSpc>
+                <a:spcPct val="132000"/>
+              </a:lnSpc>
+            </a:pPr>
+            <a:r>
+              <a:rPr sz="1950" b="0" u="none" i="0">
+                <a:solidFill>
+                  <a:srgbClr val="A1A1AA"/>
+                </a:solidFill>
+                <a:latin typeface="Arial"/>
+              </a:rPr>
+              <a:t>M1 · S4</a:t>
+            </a:r>
+          </a:p>
+        </p:txBody>
+      </p:sp>
+      <p:sp>
+        <p:nvSpPr>
+          <p:cNvPr id="15" name="TextBox 14"/>
+          <p:cNvSpPr txBox="1"/>
+          <p:nvPr/>
+        </p:nvSpPr>
+        <p:spPr>
+          <a:xfrm>
+            <a:off x="3200400" y="5200650"/>
+            <a:ext cx="10972800" cy="402336"/>
+          </a:xfrm>
+          <a:prstGeom prst="rect">
+            <a:avLst/>
+          </a:prstGeom>
+          <a:noFill/>
+        </p:spPr>
+        <p:txBody>
+          <a:bodyPr wrap="square" lIns="0" rIns="0" tIns="0" bIns="0" anchor="t">
+            <a:spAutoFit/>
+          </a:bodyPr>
+          <a:lstStyle/>
+          <a:p>
+            <a:pPr algn="l">
+              <a:lnSpc>
+                <a:spcPct val="132000"/>
+              </a:lnSpc>
+            </a:pPr>
+            <a:r>
+              <a:rPr sz="2400" b="0" u="none" i="0">
+                <a:solidFill>
+                  <a:srgbClr val="18181B"/>
+                </a:solidFill>
+                <a:latin typeface="Arial"/>
+              </a:rPr>
+              <a:t>Measure requests per bank near the SRAM limit and addressing overhead.</a:t>
+            </a:r>
+          </a:p>
+        </p:txBody>
+      </p:sp>
+      <p:sp>
+        <p:nvSpPr>
+          <p:cNvPr id="16" name="rule"/>
+          <p:cNvSpPr/>
+          <p:nvPr/>
+        </p:nvSpPr>
+        <p:spPr>
+          <a:xfrm>
+            <a:off x="987552" y="5813298"/>
+            <a:ext cx="14282928" cy="10972"/>
+          </a:xfrm>
+          <a:prstGeom prst="rect">
+            <a:avLst/>
+          </a:prstGeom>
+          <a:solidFill>
+            <a:srgbClr val="E4E4E7"/>
+          </a:solidFill>
+          <a:ln>
+            <a:noFill/>
+          </a:ln>
+          <a:effectLst/>
+        </p:spPr>
+        <p:style>
+          <a:lnRef idx="1">
+            <a:schemeClr val="accent1"/>
+          </a:lnRef>
+          <a:fillRef idx="3">
+            <a:schemeClr val="accent1"/>
+          </a:fillRef>
+          <a:effectRef idx="2">
+            <a:schemeClr val="accent1"/>
+          </a:effectRef>
+          <a:fontRef idx="minor">
+            <a:schemeClr val="lt1"/>
+          </a:fontRef>
+        </p:style>
+        <p:txBody>
+          <a:bodyPr rtlCol="0" anchor="ctr"/>
+          <a:lstStyle/>
+          <a:p>
+            <a:pPr algn="ctr"/>
+          </a:p>
+        </p:txBody>
+      </p:sp>
+      <p:sp>
+        <p:nvSpPr>
+          <p:cNvPr id="17" name="TextBox 16"/>
+          <p:cNvSpPr txBox="1"/>
+          <p:nvPr/>
+        </p:nvSpPr>
+        <p:spPr>
+          <a:xfrm>
+            <a:off x="987552" y="6069330"/>
+            <a:ext cx="2093976" cy="326898"/>
+          </a:xfrm>
+          <a:prstGeom prst="rect">
+            <a:avLst/>
+          </a:prstGeom>
+          <a:noFill/>
+        </p:spPr>
+        <p:txBody>
+          <a:bodyPr wrap="square" lIns="0" rIns="0" tIns="0" bIns="0" anchor="t">
+            <a:spAutoFit/>
+          </a:bodyPr>
+          <a:lstStyle/>
+          <a:p>
+            <a:pPr algn="l">
+              <a:lnSpc>
+                <a:spcPct val="132000"/>
+              </a:lnSpc>
+            </a:pPr>
+            <a:r>
+              <a:rPr sz="1950" b="0" u="none" i="0">
+                <a:solidFill>
+                  <a:srgbClr val="A1A1AA"/>
+                </a:solidFill>
+                <a:latin typeface="Arial"/>
+              </a:rPr>
+              <a:t>M1 · S5</a:t>
+            </a:r>
+          </a:p>
+        </p:txBody>
+      </p:sp>
+      <p:sp>
+        <p:nvSpPr>
+          <p:cNvPr id="18" name="TextBox 17"/>
+          <p:cNvSpPr txBox="1"/>
+          <p:nvPr/>
+        </p:nvSpPr>
+        <p:spPr>
+          <a:xfrm>
+            <a:off x="3200400" y="6032754"/>
+            <a:ext cx="10972800" cy="402336"/>
+          </a:xfrm>
+          <a:prstGeom prst="rect">
+            <a:avLst/>
+          </a:prstGeom>
+          <a:noFill/>
+        </p:spPr>
+        <p:txBody>
+          <a:bodyPr wrap="square" lIns="0" rIns="0" tIns="0" bIns="0" anchor="t">
+            <a:spAutoFit/>
+          </a:bodyPr>
+          <a:lstStyle/>
+          <a:p>
+            <a:pPr algn="l">
+              <a:lnSpc>
+                <a:spcPct val="132000"/>
+              </a:lnSpc>
+            </a:pPr>
+            <a:r>
+              <a:rPr sz="2400" b="0" u="none" i="0">
+                <a:solidFill>
+                  <a:srgbClr val="18181B"/>
+                </a:solidFill>
+                <a:latin typeface="Arial"/>
+              </a:rPr>
+              <a:t>Verify full/partial hits, misses, and eviction end to end against the oracle.</a:t>
             </a:r>
           </a:p>
         </p:txBody>

--- a/projects/WaferEngine-staging/meetings/2026-08-02.pptx
+++ b/projects/WaferEngine-staging/meetings/2026-08-02.pptx
@@ -5,7 +5,7 @@
     <p:sldMasterId id="2147483648" r:id="rId1"/>
   </p:sldMasterIdLst>
   <p:notesMasterIdLst>
-    <p:notesMasterId r:id="rId18"/>
+    <p:notesMasterId r:id="rId19"/>
   </p:notesMasterIdLst>
   <p:sldIdLst>
     <p:sldId id="256" r:id="rId2"/>
@@ -22,9 +22,9 @@
     <p:sldId id="266" r:id="rId13"/>
     <p:sldId id="267" r:id="rId14"/>
     <p:sldId id="268" r:id="rId15"/>
-    <p:sldId id="269" r:id="rId16"/>
-    <p:sldId id="270" r:id="rId17"/>
-    <p:sldId id="272" r:id="rId23"/>
+    <p:sldId id="272" r:id="rId16"/>
+    <p:sldId id="269" r:id="rId17"/>
+    <p:sldId id="270" r:id="rId18"/>
   </p:sldIdLst>
   <p:sldSz cx="18288000" cy="10287000"/>
   <p:notesSz cx="10287000" cy="18288000"/>
@@ -562,7 +562,7 @@
           <a:lstStyle/>
           <a:p>
             <a:r>
-              <a:t>The safe conclusion is a workload- and implementation-dependent segmented policy, not a universal 700-token rule.</a:t>
+              <a:t>M2 is condensed into one closeout line. The authoritative M1 milestone marks S0 and S1 complete; its remaining dependency chain is S2 to S3 to S4 to S5. The partial-hit open question is resolved by the S3 take-over default, while exact SRAM sizing is part of S4.</a:t>
             </a:r>
           </a:p>
         </p:txBody>
@@ -608,7 +608,7 @@
           <a:lstStyle/>
           <a:p>
             <a:r>
-              <a:t>E12b prefill ingress is gated: transport work alone cannot remove the measured S6a compute floor.</a:t>
+              <a:t>The safe conclusion is a workload- and implementation-dependent segmented policy, not a universal 700-token rule.</a:t>
             </a:r>
           </a:p>
         </p:txBody>
@@ -622,7 +622,7 @@
 </file>
 
 <file path=ppt/notesSlides/notesSlide17.xml><?xml version="1.0" encoding="utf-8"?>
-<p:notes xmlns:a="http://schemas.openxmlformats.org/drawingml/2006/main" xmlns:p="http://schemas.openxmlformats.org/presentationml/2006/main" xmlns:r="http://schemas.openxmlformats.org/officeDocument/2006/relationships">
+<p:notes xmlns:a="http://schemas.openxmlformats.org/drawingml/2006/main" xmlns:r="http://schemas.openxmlformats.org/officeDocument/2006/relationships" xmlns:p="http://schemas.openxmlformats.org/presentationml/2006/main">
   <p:cSld>
     <p:spTree>
       <p:nvGrpSpPr>
@@ -654,7 +654,7 @@
           <a:lstStyle/>
           <a:p>
             <a:r>
-              <a:t>M2 is condensed into one closeout line. The authoritative M1 milestone marks S0 and S1 complete; its remaining dependency chain is S2 to S3 to S4 to S5. The partial-hit open question is resolved by the S3 take-over default, while exact SRAM sizing is part of S4.</a:t>
+              <a:t>E12b prefill ingress is gated: transport work alone cannot remove the measured S6a compute floor.</a:t>
             </a:r>
           </a:p>
         </p:txBody>
@@ -2828,7 +2828,7 @@
                 </a:solidFill>
                 <a:latin typeface="Arial"/>
               </a:rPr>
-              <a:t>WHAT THE EVIDENCE SUPPORTS</a:t>
+              <a:t>MILESTONE CURSOR</a:t>
             </a:r>
           </a:p>
         </p:txBody>
@@ -2867,138 +2867,21 @@
                 </a:solidFill>
                 <a:latin typeface="Arial"/>
               </a:rPr>
-              <a:t>A conditional policy, with explicit gaps</a:t>
-            </a:r>
-          </a:p>
-        </p:txBody>
-      </p:sp>
-      <p:sp>
-        <p:nvSpPr>
-          <p:cNvPr id="4" name="TextBox 3"/>
-          <p:cNvSpPr txBox="1"/>
+              <a:t>Finish M2, then resume M1 from S2</a:t>
+            </a:r>
+          </a:p>
+        </p:txBody>
+      </p:sp>
+      <p:sp>
+        <p:nvSpPr>
+          <p:cNvPr id="4" name="rule"/>
+          <p:cNvSpPr/>
           <p:nvPr/>
         </p:nvSpPr>
         <p:spPr>
           <a:xfrm>
             <a:off x="987552" y="2484882"/>
-            <a:ext cx="5734385" cy="326898"/>
-          </a:xfrm>
-          <a:prstGeom prst="rect">
-            <a:avLst/>
-          </a:prstGeom>
-          <a:noFill/>
-        </p:spPr>
-        <p:txBody>
-          <a:bodyPr wrap="square" lIns="0" tIns="0" rIns="0" bIns="0" anchor="t">
-            <a:spAutoFit/>
-          </a:bodyPr>
-          <a:lstStyle/>
-          <a:p>
-            <a:pPr algn="l">
-              <a:lnSpc>
-                <a:spcPct val="132000"/>
-              </a:lnSpc>
-            </a:pPr>
-            <a:r>
-              <a:rPr sz="1950" b="0" i="0" u="none" spc="150">
-                <a:solidFill>
-                  <a:srgbClr val="A1A1AA"/>
-                </a:solidFill>
-                <a:latin typeface="Arial"/>
-              </a:rPr>
-              <a:t>STATEMENT</a:t>
-            </a:r>
-          </a:p>
-        </p:txBody>
-      </p:sp>
-      <p:sp>
-        <p:nvSpPr>
-          <p:cNvPr id="5" name="TextBox 4"/>
-          <p:cNvSpPr txBox="1"/>
-          <p:nvPr/>
-        </p:nvSpPr>
-        <p:spPr>
-          <a:xfrm>
-            <a:off x="6913961" y="2484882"/>
-            <a:ext cx="3504346" cy="326898"/>
-          </a:xfrm>
-          <a:prstGeom prst="rect">
-            <a:avLst/>
-          </a:prstGeom>
-          <a:noFill/>
-        </p:spPr>
-        <p:txBody>
-          <a:bodyPr wrap="square" lIns="0" tIns="0" rIns="0" bIns="0" anchor="t">
-            <a:spAutoFit/>
-          </a:bodyPr>
-          <a:lstStyle/>
-          <a:p>
-            <a:pPr algn="l">
-              <a:lnSpc>
-                <a:spcPct val="132000"/>
-              </a:lnSpc>
-            </a:pPr>
-            <a:r>
-              <a:rPr sz="1950" b="0" i="0" u="none" spc="150">
-                <a:solidFill>
-                  <a:srgbClr val="A1A1AA"/>
-                </a:solidFill>
-                <a:latin typeface="Arial"/>
-              </a:rPr>
-              <a:t>EVIDENCE STRENGTH</a:t>
-            </a:r>
-          </a:p>
-        </p:txBody>
-      </p:sp>
-      <p:sp>
-        <p:nvSpPr>
-          <p:cNvPr id="6" name="TextBox 5"/>
-          <p:cNvSpPr txBox="1"/>
-          <p:nvPr/>
-        </p:nvSpPr>
-        <p:spPr>
-          <a:xfrm>
-            <a:off x="10610331" y="2484882"/>
-            <a:ext cx="6690116" cy="326898"/>
-          </a:xfrm>
-          <a:prstGeom prst="rect">
-            <a:avLst/>
-          </a:prstGeom>
-          <a:noFill/>
-        </p:spPr>
-        <p:txBody>
-          <a:bodyPr wrap="square" lIns="0" tIns="0" rIns="0" bIns="0" anchor="t">
-            <a:spAutoFit/>
-          </a:bodyPr>
-          <a:lstStyle/>
-          <a:p>
-            <a:pPr algn="l">
-              <a:lnSpc>
-                <a:spcPct val="132000"/>
-              </a:lnSpc>
-            </a:pPr>
-            <a:r>
-              <a:rPr sz="1950" b="0" i="0" u="none" spc="150">
-                <a:solidFill>
-                  <a:srgbClr val="A1A1AA"/>
-                </a:solidFill>
-                <a:latin typeface="Arial"/>
-              </a:rPr>
-              <a:t>SCOPE / CAVEAT</a:t>
-            </a:r>
-          </a:p>
-        </p:txBody>
-      </p:sp>
-      <p:sp>
-        <p:nvSpPr>
-          <p:cNvPr id="7" name="rule"/>
-          <p:cNvSpPr/>
-          <p:nvPr/>
-        </p:nvSpPr>
-        <p:spPr>
-          <a:xfrm>
-            <a:off x="987552" y="2951226"/>
-            <a:ext cx="5734385" cy="10972"/>
+            <a:ext cx="14282928" cy="10972"/>
           </a:xfrm>
           <a:prstGeom prst="rect">
             <a:avLst/>
@@ -3036,14 +2919,14 @@
       </p:sp>
       <p:sp>
         <p:nvSpPr>
-          <p:cNvPr id="8" name="TextBox 7"/>
+          <p:cNvPr id="5" name="TextBox 4"/>
           <p:cNvSpPr txBox="1"/>
           <p:nvPr/>
         </p:nvSpPr>
         <p:spPr>
           <a:xfrm>
-            <a:off x="987552" y="3188970"/>
-            <a:ext cx="5734385" cy="402336"/>
+            <a:off x="987552" y="2740913"/>
+            <a:ext cx="2093976" cy="326898"/>
           </a:xfrm>
           <a:prstGeom prst="rect">
             <a:avLst/>
@@ -3062,27 +2945,66 @@
               </a:lnSpc>
             </a:pPr>
             <a:r>
-              <a:rPr sz="2400" b="0" i="0" u="none">
+              <a:rPr sz="1950" b="0" i="0" u="none" dirty="0">
+                <a:solidFill>
+                  <a:srgbClr val="A1A1AA"/>
+                </a:solidFill>
+                <a:latin typeface="Arial"/>
+              </a:rPr>
+              <a:t>M2 · CLOSE</a:t>
+            </a:r>
+          </a:p>
+        </p:txBody>
+      </p:sp>
+      <p:sp>
+        <p:nvSpPr>
+          <p:cNvPr id="6" name="TextBox 5"/>
+          <p:cNvSpPr txBox="1"/>
+          <p:nvPr/>
+        </p:nvSpPr>
+        <p:spPr>
+          <a:xfrm>
+            <a:off x="3200400" y="2704337"/>
+            <a:ext cx="10972800" cy="402336"/>
+          </a:xfrm>
+          <a:prstGeom prst="rect">
+            <a:avLst/>
+          </a:prstGeom>
+          <a:noFill/>
+        </p:spPr>
+        <p:txBody>
+          <a:bodyPr wrap="square" lIns="0" tIns="0" rIns="0" bIns="0" anchor="t">
+            <a:spAutoFit/>
+          </a:bodyPr>
+          <a:lstStyle/>
+          <a:p>
+            <a:pPr algn="l">
+              <a:lnSpc>
+                <a:spcPct val="132000"/>
+              </a:lnSpc>
+            </a:pPr>
+            <a:r>
+              <a:rPr sz="2400" b="0" i="0" u="none" dirty="0">
                 <a:solidFill>
                   <a:srgbClr val="18181B"/>
                 </a:solidFill>
                 <a:latin typeface="Arial"/>
               </a:rPr>
-              <a:t>Ingress has a ~46 ms floor</a:t>
-            </a:r>
-          </a:p>
-        </p:txBody>
-      </p:sp>
-      <p:sp>
-        <p:nvSpPr>
-          <p:cNvPr id="9" name="rule"/>
+              <a:t>Reconcile Lane B; close E14/E11 and conditional E13; keep E12 gated.</a:t>
+            </a:r>
+          </a:p>
+        </p:txBody>
+      </p:sp>
+      <p:sp>
+        <p:nvSpPr>
+          <p:cNvPr id="7" name="rule"/>
           <p:cNvSpPr/>
           <p:nvPr/>
         </p:nvSpPr>
         <p:spPr>
           <a:xfrm>
-            <a:off x="6913961" y="2951226"/>
-            <a:ext cx="3504346" cy="10972"/>
+            <a:off x="987552" y="3316986"/>
+            <a:ext cx="14282928" cy="10972"/>
           </a:xfrm>
           <a:prstGeom prst="rect">
             <a:avLst/>
@@ -3120,14 +3042,14 @@
       </p:sp>
       <p:sp>
         <p:nvSpPr>
-          <p:cNvPr id="10" name="TextBox 9"/>
+          <p:cNvPr id="8" name="TextBox 7"/>
           <p:cNvSpPr txBox="1"/>
           <p:nvPr/>
         </p:nvSpPr>
         <p:spPr>
           <a:xfrm>
-            <a:off x="6913961" y="3188970"/>
-            <a:ext cx="3504346" cy="326898"/>
+            <a:off x="987552" y="3573018"/>
+            <a:ext cx="2093976" cy="326898"/>
           </a:xfrm>
           <a:prstGeom prst="rect">
             <a:avLst/>
@@ -3148,25 +3070,64 @@
             <a:r>
               <a:rPr sz="1950" b="0" i="0" u="none">
                 <a:solidFill>
-                  <a:srgbClr val="52525B"/>
-                </a:solidFill>
-                <a:latin typeface="Arial"/>
-              </a:rPr>
-              <a:t>Direct measured</a:t>
-            </a:r>
-          </a:p>
-        </p:txBody>
-      </p:sp>
-      <p:sp>
-        <p:nvSpPr>
-          <p:cNvPr id="11" name="rule"/>
+                  <a:srgbClr val="A1A1AA"/>
+                </a:solidFill>
+                <a:latin typeface="Arial"/>
+              </a:rPr>
+              <a:t>M1 · S2 NEXT</a:t>
+            </a:r>
+          </a:p>
+        </p:txBody>
+      </p:sp>
+      <p:sp>
+        <p:nvSpPr>
+          <p:cNvPr id="9" name="TextBox 8"/>
+          <p:cNvSpPr txBox="1"/>
+          <p:nvPr/>
+        </p:nvSpPr>
+        <p:spPr>
+          <a:xfrm>
+            <a:off x="3200400" y="3536441"/>
+            <a:ext cx="10972800" cy="402336"/>
+          </a:xfrm>
+          <a:prstGeom prst="rect">
+            <a:avLst/>
+          </a:prstGeom>
+          <a:noFill/>
+        </p:spPr>
+        <p:txBody>
+          <a:bodyPr wrap="square" lIns="0" tIns="0" rIns="0" bIns="0" anchor="t">
+            <a:spAutoFit/>
+          </a:bodyPr>
+          <a:lstStyle/>
+          <a:p>
+            <a:pPr algn="l">
+              <a:lnSpc>
+                <a:spcPct val="132000"/>
+              </a:lnSpc>
+            </a:pPr>
+            <a:r>
+              <a:rPr sz="2400" b="0" i="0" u="none">
+                <a:solidFill>
+                  <a:srgbClr val="18181B"/>
+                </a:solidFill>
+                <a:latin typeface="Arial"/>
+              </a:rPr>
+              <a:t>Track per-slot valid_len and verify retention as active slots change.</a:t>
+            </a:r>
+          </a:p>
+        </p:txBody>
+      </p:sp>
+      <p:sp>
+        <p:nvSpPr>
+          <p:cNvPr id="10" name="rule"/>
           <p:cNvSpPr/>
           <p:nvPr/>
         </p:nvSpPr>
         <p:spPr>
           <a:xfrm>
-            <a:off x="10610331" y="2951226"/>
-            <a:ext cx="6690116" cy="10972"/>
+            <a:off x="987552" y="4149089"/>
+            <a:ext cx="14282928" cy="10972"/>
           </a:xfrm>
           <a:prstGeom prst="rect">
             <a:avLst/>
@@ -3204,14 +3165,14 @@
       </p:sp>
       <p:sp>
         <p:nvSpPr>
-          <p:cNvPr id="12" name="TextBox 11"/>
+          <p:cNvPr id="11" name="TextBox 10"/>
           <p:cNvSpPr txBox="1"/>
           <p:nvPr/>
         </p:nvSpPr>
         <p:spPr>
           <a:xfrm>
-            <a:off x="10610331" y="3188970"/>
-            <a:ext cx="6690116" cy="326898"/>
+            <a:off x="987552" y="4405122"/>
+            <a:ext cx="2093976" cy="326898"/>
           </a:xfrm>
           <a:prstGeom prst="rect">
             <a:avLst/>
@@ -3232,11 +3193,50 @@
             <a:r>
               <a:rPr sz="1950" b="0" i="0" u="none">
                 <a:solidFill>
-                  <a:srgbClr val="52525B"/>
-                </a:solidFill>
-                <a:latin typeface="Arial"/>
-              </a:rPr>
-              <a:t>pdSeparate decode ingress</a:t>
+                  <a:srgbClr val="A1A1AA"/>
+                </a:solidFill>
+                <a:latin typeface="Arial"/>
+              </a:rPr>
+              <a:t>M1 · S3</a:t>
+            </a:r>
+          </a:p>
+        </p:txBody>
+      </p:sp>
+      <p:sp>
+        <p:nvSpPr>
+          <p:cNvPr id="12" name="TextBox 11"/>
+          <p:cNvSpPr txBox="1"/>
+          <p:nvPr/>
+        </p:nvSpPr>
+        <p:spPr>
+          <a:xfrm>
+            <a:off x="3200400" y="4368546"/>
+            <a:ext cx="10972800" cy="402336"/>
+          </a:xfrm>
+          <a:prstGeom prst="rect">
+            <a:avLst/>
+          </a:prstGeom>
+          <a:noFill/>
+        </p:spPr>
+        <p:txBody>
+          <a:bodyPr wrap="square" lIns="0" tIns="0" rIns="0" bIns="0" anchor="t">
+            <a:spAutoFit/>
+          </a:bodyPr>
+          <a:lstStyle/>
+          <a:p>
+            <a:pPr algn="l">
+              <a:lnSpc>
+                <a:spcPct val="132000"/>
+              </a:lnSpc>
+            </a:pPr>
+            <a:r>
+              <a:rPr sz="2400" b="0" i="0" u="none">
+                <a:solidFill>
+                  <a:srgbClr val="18181B"/>
+                </a:solidFill>
+                <a:latin typeface="Arial"/>
+              </a:rPr>
+              <a:t>Implement prefix hits, skip-prefill, LRU replace, miss rebuild, and truncation.</a:t>
             </a:r>
           </a:p>
         </p:txBody>
@@ -3249,8 +3249,8 @@
         </p:nvSpPr>
         <p:spPr>
           <a:xfrm>
-            <a:off x="987552" y="3774186"/>
-            <a:ext cx="5734385" cy="10972"/>
+            <a:off x="987552" y="4981194"/>
+            <a:ext cx="14282928" cy="10972"/>
           </a:xfrm>
           <a:prstGeom prst="rect">
             <a:avLst/>
@@ -3294,8 +3294,8 @@
         </p:nvSpPr>
         <p:spPr>
           <a:xfrm>
-            <a:off x="987552" y="4011930"/>
-            <a:ext cx="5734385" cy="402336"/>
+            <a:off x="987552" y="5237226"/>
+            <a:ext cx="2093976" cy="326898"/>
           </a:xfrm>
           <a:prstGeom prst="rect">
             <a:avLst/>
@@ -3314,27 +3314,66 @@
               </a:lnSpc>
             </a:pPr>
             <a:r>
+              <a:rPr sz="1950" b="0" i="0" u="none">
+                <a:solidFill>
+                  <a:srgbClr val="A1A1AA"/>
+                </a:solidFill>
+                <a:latin typeface="Arial"/>
+              </a:rPr>
+              <a:t>M1 · S4</a:t>
+            </a:r>
+          </a:p>
+        </p:txBody>
+      </p:sp>
+      <p:sp>
+        <p:nvSpPr>
+          <p:cNvPr id="15" name="TextBox 14"/>
+          <p:cNvSpPr txBox="1"/>
+          <p:nvPr/>
+        </p:nvSpPr>
+        <p:spPr>
+          <a:xfrm>
+            <a:off x="3200400" y="5200650"/>
+            <a:ext cx="10972800" cy="402336"/>
+          </a:xfrm>
+          <a:prstGeom prst="rect">
+            <a:avLst/>
+          </a:prstGeom>
+          <a:noFill/>
+        </p:spPr>
+        <p:txBody>
+          <a:bodyPr wrap="square" lIns="0" tIns="0" rIns="0" bIns="0" anchor="t">
+            <a:spAutoFit/>
+          </a:bodyPr>
+          <a:lstStyle/>
+          <a:p>
+            <a:pPr algn="l">
+              <a:lnSpc>
+                <a:spcPct val="132000"/>
+              </a:lnSpc>
+            </a:pPr>
+            <a:r>
               <a:rPr sz="2400" b="0" i="0" u="none">
                 <a:solidFill>
                   <a:srgbClr val="18181B"/>
                 </a:solidFill>
                 <a:latin typeface="Arial"/>
               </a:rPr>
-              <a:t>Forced steady cost grows with position</a:t>
-            </a:r>
-          </a:p>
-        </p:txBody>
-      </p:sp>
-      <p:sp>
-        <p:nvSpPr>
-          <p:cNvPr id="15" name="rule"/>
+              <a:t>Measure requests per bank near the SRAM limit and addressing overhead.</a:t>
+            </a:r>
+          </a:p>
+        </p:txBody>
+      </p:sp>
+      <p:sp>
+        <p:nvSpPr>
+          <p:cNvPr id="16" name="rule"/>
           <p:cNvSpPr/>
           <p:nvPr/>
         </p:nvSpPr>
         <p:spPr>
           <a:xfrm>
-            <a:off x="6913961" y="3774186"/>
-            <a:ext cx="3504346" cy="10972"/>
+            <a:off x="987552" y="5813298"/>
+            <a:ext cx="14282928" cy="10972"/>
           </a:xfrm>
           <a:prstGeom prst="rect">
             <a:avLst/>
@@ -3372,14 +3411,14 @@
       </p:sp>
       <p:sp>
         <p:nvSpPr>
-          <p:cNvPr id="16" name="TextBox 15"/>
+          <p:cNvPr id="17" name="TextBox 16"/>
           <p:cNvSpPr txBox="1"/>
           <p:nvPr/>
         </p:nvSpPr>
         <p:spPr>
           <a:xfrm>
-            <a:off x="6913961" y="4011930"/>
-            <a:ext cx="3504346" cy="326898"/>
+            <a:off x="987552" y="6069330"/>
+            <a:ext cx="2093976" cy="326898"/>
           </a:xfrm>
           <a:prstGeom prst="rect">
             <a:avLst/>
@@ -3400,57 +3439,12 @@
             <a:r>
               <a:rPr sz="1950" b="0" i="0" u="none">
                 <a:solidFill>
-                  <a:srgbClr val="52525B"/>
-                </a:solidFill>
-                <a:latin typeface="Arial"/>
-              </a:rPr>
-              <a:t>Measured + fit</a:t>
-            </a:r>
-          </a:p>
-        </p:txBody>
-      </p:sp>
-      <p:sp>
-        <p:nvSpPr>
-          <p:cNvPr id="17" name="rule"/>
-          <p:cNvSpPr/>
-          <p:nvPr/>
-        </p:nvSpPr>
-        <p:spPr>
-          <a:xfrm>
-            <a:off x="10610331" y="3774186"/>
-            <a:ext cx="6690116" cy="10972"/>
-          </a:xfrm>
-          <a:prstGeom prst="rect">
-            <a:avLst/>
-          </a:prstGeom>
-          <a:solidFill>
-            <a:srgbClr val="E4E4E7"/>
-          </a:solidFill>
-          <a:ln>
-            <a:noFill/>
-          </a:ln>
-          <a:effectLst/>
-        </p:spPr>
-        <p:style>
-          <a:lnRef idx="1">
-            <a:schemeClr val="accent1"/>
-          </a:lnRef>
-          <a:fillRef idx="3">
-            <a:schemeClr val="accent1"/>
-          </a:fillRef>
-          <a:effectRef idx="2">
-            <a:schemeClr val="accent1"/>
-          </a:effectRef>
-          <a:fontRef idx="minor">
-            <a:schemeClr val="lt1"/>
-          </a:fontRef>
-        </p:style>
-        <p:txBody>
-          <a:bodyPr rtlCol="0" anchor="ctr"/>
-          <a:lstStyle/>
-          <a:p>
-            <a:pPr algn="ctr"/>
-            <a:endParaRPr/>
+                  <a:srgbClr val="A1A1AA"/>
+                </a:solidFill>
+                <a:latin typeface="Arial"/>
+              </a:rPr>
+              <a:t>M1 · S5</a:t>
+            </a:r>
           </a:p>
         </p:txBody>
       </p:sp>
@@ -3462,8 +3456,8 @@
         </p:nvSpPr>
         <p:spPr>
           <a:xfrm>
-            <a:off x="10610331" y="4011930"/>
-            <a:ext cx="6690116" cy="326898"/>
+            <a:off x="3200400" y="6032754"/>
+            <a:ext cx="10972800" cy="402336"/>
           </a:xfrm>
           <a:prstGeom prst="rect">
             <a:avLst/>
@@ -3482,1021 +3476,13 @@
               </a:lnSpc>
             </a:pPr>
             <a:r>
-              <a:rPr sz="1950" b="0" i="0" u="none">
-                <a:solidFill>
-                  <a:srgbClr val="52525B"/>
-                </a:solidFill>
-                <a:latin typeface="Arial"/>
-              </a:rPr>
-              <a:t>16 E14 steady segments</a:t>
-            </a:r>
-          </a:p>
-        </p:txBody>
-      </p:sp>
-      <p:sp>
-        <p:nvSpPr>
-          <p:cNvPr id="19" name="rule"/>
-          <p:cNvSpPr/>
-          <p:nvPr/>
-        </p:nvSpPr>
-        <p:spPr>
-          <a:xfrm>
-            <a:off x="987552" y="4597146"/>
-            <a:ext cx="5734385" cy="10972"/>
-          </a:xfrm>
-          <a:prstGeom prst="rect">
-            <a:avLst/>
-          </a:prstGeom>
-          <a:solidFill>
-            <a:srgbClr val="E4E4E7"/>
-          </a:solidFill>
-          <a:ln>
-            <a:noFill/>
-          </a:ln>
-          <a:effectLst/>
-        </p:spPr>
-        <p:style>
-          <a:lnRef idx="1">
-            <a:schemeClr val="accent1"/>
-          </a:lnRef>
-          <a:fillRef idx="3">
-            <a:schemeClr val="accent1"/>
-          </a:fillRef>
-          <a:effectRef idx="2">
-            <a:schemeClr val="accent1"/>
-          </a:effectRef>
-          <a:fontRef idx="minor">
-            <a:schemeClr val="lt1"/>
-          </a:fontRef>
-        </p:style>
-        <p:txBody>
-          <a:bodyPr rtlCol="0" anchor="ctr"/>
-          <a:lstStyle/>
-          <a:p>
-            <a:pPr algn="ctr"/>
-            <a:endParaRPr/>
-          </a:p>
-        </p:txBody>
-      </p:sp>
-      <p:sp>
-        <p:nvSpPr>
-          <p:cNvPr id="20" name="TextBox 19"/>
-          <p:cNvSpPr txBox="1"/>
-          <p:nvPr/>
-        </p:nvSpPr>
-        <p:spPr>
-          <a:xfrm>
-            <a:off x="987552" y="4834890"/>
-            <a:ext cx="5734385" cy="402336"/>
-          </a:xfrm>
-          <a:prstGeom prst="rect">
-            <a:avLst/>
-          </a:prstGeom>
-          <a:noFill/>
-        </p:spPr>
-        <p:txBody>
-          <a:bodyPr wrap="square" lIns="0" tIns="0" rIns="0" bIns="0" anchor="t">
-            <a:spAutoFit/>
-          </a:bodyPr>
-          <a:lstStyle/>
-          <a:p>
-            <a:pPr algn="l">
-              <a:lnSpc>
-                <a:spcPct val="132000"/>
-              </a:lnSpc>
-            </a:pPr>
-            <a:r>
               <a:rPr sz="2400" b="0" i="0" u="none">
                 <a:solidFill>
                   <a:srgbClr val="18181B"/>
                 </a:solidFill>
                 <a:latin typeface="Arial"/>
               </a:rPr>
-              <a:t>A/B winner flips at 512→1024</a:t>
-            </a:r>
-          </a:p>
-        </p:txBody>
-      </p:sp>
-      <p:sp>
-        <p:nvSpPr>
-          <p:cNvPr id="21" name="rule"/>
-          <p:cNvSpPr/>
-          <p:nvPr/>
-        </p:nvSpPr>
-        <p:spPr>
-          <a:xfrm>
-            <a:off x="6913961" y="4597146"/>
-            <a:ext cx="3504346" cy="10972"/>
-          </a:xfrm>
-          <a:prstGeom prst="rect">
-            <a:avLst/>
-          </a:prstGeom>
-          <a:solidFill>
-            <a:srgbClr val="E4E4E7"/>
-          </a:solidFill>
-          <a:ln>
-            <a:noFill/>
-          </a:ln>
-          <a:effectLst/>
-        </p:spPr>
-        <p:style>
-          <a:lnRef idx="1">
-            <a:schemeClr val="accent1"/>
-          </a:lnRef>
-          <a:fillRef idx="3">
-            <a:schemeClr val="accent1"/>
-          </a:fillRef>
-          <a:effectRef idx="2">
-            <a:schemeClr val="accent1"/>
-          </a:effectRef>
-          <a:fontRef idx="minor">
-            <a:schemeClr val="lt1"/>
-          </a:fontRef>
-        </p:style>
-        <p:txBody>
-          <a:bodyPr rtlCol="0" anchor="ctr"/>
-          <a:lstStyle/>
-          <a:p>
-            <a:pPr algn="ctr"/>
-            <a:endParaRPr/>
-          </a:p>
-        </p:txBody>
-      </p:sp>
-      <p:sp>
-        <p:nvSpPr>
-          <p:cNvPr id="22" name="TextBox 21"/>
-          <p:cNvSpPr txBox="1"/>
-          <p:nvPr/>
-        </p:nvSpPr>
-        <p:spPr>
-          <a:xfrm>
-            <a:off x="6913961" y="4834890"/>
-            <a:ext cx="3504346" cy="326898"/>
-          </a:xfrm>
-          <a:prstGeom prst="rect">
-            <a:avLst/>
-          </a:prstGeom>
-          <a:noFill/>
-        </p:spPr>
-        <p:txBody>
-          <a:bodyPr wrap="square" lIns="0" tIns="0" rIns="0" bIns="0" anchor="t">
-            <a:spAutoFit/>
-          </a:bodyPr>
-          <a:lstStyle/>
-          <a:p>
-            <a:pPr algn="l">
-              <a:lnSpc>
-                <a:spcPct val="132000"/>
-              </a:lnSpc>
-            </a:pPr>
-            <a:r>
-              <a:rPr sz="1950" b="0" i="0" u="none">
-                <a:solidFill>
-                  <a:srgbClr val="52525B"/>
-                </a:solidFill>
-                <a:latin typeface="Arial"/>
-              </a:rPr>
-              <a:t>Direct measured</a:t>
-            </a:r>
-          </a:p>
-        </p:txBody>
-      </p:sp>
-      <p:sp>
-        <p:nvSpPr>
-          <p:cNvPr id="23" name="rule"/>
-          <p:cNvSpPr/>
-          <p:nvPr/>
-        </p:nvSpPr>
-        <p:spPr>
-          <a:xfrm>
-            <a:off x="10610331" y="4597146"/>
-            <a:ext cx="6690116" cy="10972"/>
-          </a:xfrm>
-          <a:prstGeom prst="rect">
-            <a:avLst/>
-          </a:prstGeom>
-          <a:solidFill>
-            <a:srgbClr val="E4E4E7"/>
-          </a:solidFill>
-          <a:ln>
-            <a:noFill/>
-          </a:ln>
-          <a:effectLst/>
-        </p:spPr>
-        <p:style>
-          <a:lnRef idx="1">
-            <a:schemeClr val="accent1"/>
-          </a:lnRef>
-          <a:fillRef idx="3">
-            <a:schemeClr val="accent1"/>
-          </a:fillRef>
-          <a:effectRef idx="2">
-            <a:schemeClr val="accent1"/>
-          </a:effectRef>
-          <a:fontRef idx="minor">
-            <a:schemeClr val="lt1"/>
-          </a:fontRef>
-        </p:style>
-        <p:txBody>
-          <a:bodyPr rtlCol="0" anchor="ctr"/>
-          <a:lstStyle/>
-          <a:p>
-            <a:pPr algn="ctr"/>
-            <a:endParaRPr/>
-          </a:p>
-        </p:txBody>
-      </p:sp>
-      <p:sp>
-        <p:nvSpPr>
-          <p:cNvPr id="24" name="TextBox 23"/>
-          <p:cNvSpPr txBox="1"/>
-          <p:nvPr/>
-        </p:nvSpPr>
-        <p:spPr>
-          <a:xfrm>
-            <a:off x="10610331" y="4834890"/>
-            <a:ext cx="6690116" cy="326898"/>
-          </a:xfrm>
-          <a:prstGeom prst="rect">
-            <a:avLst/>
-          </a:prstGeom>
-          <a:noFill/>
-        </p:spPr>
-        <p:txBody>
-          <a:bodyPr wrap="square" lIns="0" tIns="0" rIns="0" bIns="0" anchor="t">
-            <a:spAutoFit/>
-          </a:bodyPr>
-          <a:lstStyle/>
-          <a:p>
-            <a:pPr algn="l">
-              <a:lnSpc>
-                <a:spcPct val="132000"/>
-              </a:lnSpc>
-            </a:pPr>
-            <a:r>
-              <a:rPr sz="1950" b="0" i="0" u="none">
-                <a:solidFill>
-                  <a:srgbClr val="52525B"/>
-                </a:solidFill>
-                <a:latin typeface="Arial"/>
-              </a:rPr>
-              <a:t>Lnew=256 resume setting</a:t>
-            </a:r>
-          </a:p>
-        </p:txBody>
-      </p:sp>
-      <p:sp>
-        <p:nvSpPr>
-          <p:cNvPr id="25" name="rule"/>
-          <p:cNvSpPr/>
-          <p:nvPr/>
-        </p:nvSpPr>
-        <p:spPr>
-          <a:xfrm>
-            <a:off x="987552" y="5420106"/>
-            <a:ext cx="5734385" cy="10972"/>
-          </a:xfrm>
-          <a:prstGeom prst="rect">
-            <a:avLst/>
-          </a:prstGeom>
-          <a:solidFill>
-            <a:srgbClr val="E4E4E7"/>
-          </a:solidFill>
-          <a:ln>
-            <a:noFill/>
-          </a:ln>
-          <a:effectLst/>
-        </p:spPr>
-        <p:style>
-          <a:lnRef idx="1">
-            <a:schemeClr val="accent1"/>
-          </a:lnRef>
-          <a:fillRef idx="3">
-            <a:schemeClr val="accent1"/>
-          </a:fillRef>
-          <a:effectRef idx="2">
-            <a:schemeClr val="accent1"/>
-          </a:effectRef>
-          <a:fontRef idx="minor">
-            <a:schemeClr val="lt1"/>
-          </a:fontRef>
-        </p:style>
-        <p:txBody>
-          <a:bodyPr rtlCol="0" anchor="ctr"/>
-          <a:lstStyle/>
-          <a:p>
-            <a:pPr algn="ctr"/>
-            <a:endParaRPr/>
-          </a:p>
-        </p:txBody>
-      </p:sp>
-      <p:sp>
-        <p:nvSpPr>
-          <p:cNvPr id="26" name="TextBox 25"/>
-          <p:cNvSpPr txBox="1"/>
-          <p:nvPr/>
-        </p:nvSpPr>
-        <p:spPr>
-          <a:xfrm>
-            <a:off x="987552" y="5657850"/>
-            <a:ext cx="5734385" cy="402336"/>
-          </a:xfrm>
-          <a:prstGeom prst="rect">
-            <a:avLst/>
-          </a:prstGeom>
-          <a:noFill/>
-        </p:spPr>
-        <p:txBody>
-          <a:bodyPr wrap="square" lIns="0" tIns="0" rIns="0" bIns="0" anchor="t">
-            <a:spAutoFit/>
-          </a:bodyPr>
-          <a:lstStyle/>
-          <a:p>
-            <a:pPr algn="l">
-              <a:lnSpc>
-                <a:spcPct val="132000"/>
-              </a:lnSpc>
-            </a:pPr>
-            <a:r>
-              <a:rPr sz="2400" b="0" i="0" u="none">
-                <a:solidFill>
-                  <a:srgbClr val="18181B"/>
-                </a:solidFill>
-                <a:latin typeface="Arial"/>
-              </a:rPr>
-              <a:t>Crossing moves with S and reload policy</a:t>
-            </a:r>
-          </a:p>
-        </p:txBody>
-      </p:sp>
-      <p:sp>
-        <p:nvSpPr>
-          <p:cNvPr id="27" name="rule"/>
-          <p:cNvSpPr/>
-          <p:nvPr/>
-        </p:nvSpPr>
-        <p:spPr>
-          <a:xfrm>
-            <a:off x="6913961" y="5420106"/>
-            <a:ext cx="3504346" cy="10972"/>
-          </a:xfrm>
-          <a:prstGeom prst="rect">
-            <a:avLst/>
-          </a:prstGeom>
-          <a:solidFill>
-            <a:srgbClr val="E4E4E7"/>
-          </a:solidFill>
-          <a:ln>
-            <a:noFill/>
-          </a:ln>
-          <a:effectLst/>
-        </p:spPr>
-        <p:style>
-          <a:lnRef idx="1">
-            <a:schemeClr val="accent1"/>
-          </a:lnRef>
-          <a:fillRef idx="3">
-            <a:schemeClr val="accent1"/>
-          </a:fillRef>
-          <a:effectRef idx="2">
-            <a:schemeClr val="accent1"/>
-          </a:effectRef>
-          <a:fontRef idx="minor">
-            <a:schemeClr val="lt1"/>
-          </a:fontRef>
-        </p:style>
-        <p:txBody>
-          <a:bodyPr rtlCol="0" anchor="ctr"/>
-          <a:lstStyle/>
-          <a:p>
-            <a:pPr algn="ctr"/>
-            <a:endParaRPr/>
-          </a:p>
-        </p:txBody>
-      </p:sp>
-      <p:sp>
-        <p:nvSpPr>
-          <p:cNvPr id="28" name="TextBox 27"/>
-          <p:cNvSpPr txBox="1"/>
-          <p:nvPr/>
-        </p:nvSpPr>
-        <p:spPr>
-          <a:xfrm>
-            <a:off x="6913961" y="5657850"/>
-            <a:ext cx="3504346" cy="326898"/>
-          </a:xfrm>
-          <a:prstGeom prst="rect">
-            <a:avLst/>
-          </a:prstGeom>
-          <a:noFill/>
-        </p:spPr>
-        <p:txBody>
-          <a:bodyPr wrap="square" lIns="0" tIns="0" rIns="0" bIns="0" anchor="t">
-            <a:spAutoFit/>
-          </a:bodyPr>
-          <a:lstStyle/>
-          <a:p>
-            <a:pPr algn="l">
-              <a:lnSpc>
-                <a:spcPct val="132000"/>
-              </a:lnSpc>
-            </a:pPr>
-            <a:r>
-              <a:rPr sz="1950" b="0" i="0" u="none">
-                <a:solidFill>
-                  <a:srgbClr val="52525B"/>
-                </a:solidFill>
-                <a:latin typeface="Arial"/>
-              </a:rPr>
-              <a:t>Model-derived</a:t>
-            </a:r>
-          </a:p>
-        </p:txBody>
-      </p:sp>
-      <p:sp>
-        <p:nvSpPr>
-          <p:cNvPr id="29" name="rule"/>
-          <p:cNvSpPr/>
-          <p:nvPr/>
-        </p:nvSpPr>
-        <p:spPr>
-          <a:xfrm>
-            <a:off x="10610331" y="5420106"/>
-            <a:ext cx="6690116" cy="10972"/>
-          </a:xfrm>
-          <a:prstGeom prst="rect">
-            <a:avLst/>
-          </a:prstGeom>
-          <a:solidFill>
-            <a:srgbClr val="E4E4E7"/>
-          </a:solidFill>
-          <a:ln>
-            <a:noFill/>
-          </a:ln>
-          <a:effectLst/>
-        </p:spPr>
-        <p:style>
-          <a:lnRef idx="1">
-            <a:schemeClr val="accent1"/>
-          </a:lnRef>
-          <a:fillRef idx="3">
-            <a:schemeClr val="accent1"/>
-          </a:fillRef>
-          <a:effectRef idx="2">
-            <a:schemeClr val="accent1"/>
-          </a:effectRef>
-          <a:fontRef idx="minor">
-            <a:schemeClr val="lt1"/>
-          </a:fontRef>
-        </p:style>
-        <p:txBody>
-          <a:bodyPr rtlCol="0" anchor="ctr"/>
-          <a:lstStyle/>
-          <a:p>
-            <a:pPr algn="ctr"/>
-            <a:endParaRPr/>
-          </a:p>
-        </p:txBody>
-      </p:sp>
-      <p:sp>
-        <p:nvSpPr>
-          <p:cNvPr id="30" name="TextBox 29"/>
-          <p:cNvSpPr txBox="1"/>
-          <p:nvPr/>
-        </p:nvSpPr>
-        <p:spPr>
-          <a:xfrm>
-            <a:off x="10610331" y="5657850"/>
-            <a:ext cx="6690116" cy="326898"/>
-          </a:xfrm>
-          <a:prstGeom prst="rect">
-            <a:avLst/>
-          </a:prstGeom>
-          <a:noFill/>
-        </p:spPr>
-        <p:txBody>
-          <a:bodyPr wrap="square" lIns="0" tIns="0" rIns="0" bIns="0" anchor="t">
-            <a:spAutoFit/>
-          </a:bodyPr>
-          <a:lstStyle/>
-          <a:p>
-            <a:pPr algn="l">
-              <a:lnSpc>
-                <a:spcPct val="132000"/>
-              </a:lnSpc>
-            </a:pPr>
-            <a:r>
-              <a:rPr sz="1950" b="0" i="0" u="none">
-                <a:solidFill>
-                  <a:srgbClr val="52525B"/>
-                </a:solidFill>
-                <a:latin typeface="Arial"/>
-              </a:rPr>
-              <a:t>Direct witnesses pending</a:t>
-            </a:r>
-          </a:p>
-        </p:txBody>
-      </p:sp>
-      <p:sp>
-        <p:nvSpPr>
-          <p:cNvPr id="31" name="rule"/>
-          <p:cNvSpPr/>
-          <p:nvPr/>
-        </p:nvSpPr>
-        <p:spPr>
-          <a:xfrm>
-            <a:off x="987552" y="6243066"/>
-            <a:ext cx="5734385" cy="10972"/>
-          </a:xfrm>
-          <a:prstGeom prst="rect">
-            <a:avLst/>
-          </a:prstGeom>
-          <a:solidFill>
-            <a:srgbClr val="E4E4E7"/>
-          </a:solidFill>
-          <a:ln>
-            <a:noFill/>
-          </a:ln>
-          <a:effectLst/>
-        </p:spPr>
-        <p:style>
-          <a:lnRef idx="1">
-            <a:schemeClr val="accent1"/>
-          </a:lnRef>
-          <a:fillRef idx="3">
-            <a:schemeClr val="accent1"/>
-          </a:fillRef>
-          <a:effectRef idx="2">
-            <a:schemeClr val="accent1"/>
-          </a:effectRef>
-          <a:fontRef idx="minor">
-            <a:schemeClr val="lt1"/>
-          </a:fontRef>
-        </p:style>
-        <p:txBody>
-          <a:bodyPr rtlCol="0" anchor="ctr"/>
-          <a:lstStyle/>
-          <a:p>
-            <a:pPr algn="ctr"/>
-            <a:endParaRPr/>
-          </a:p>
-        </p:txBody>
-      </p:sp>
-      <p:sp>
-        <p:nvSpPr>
-          <p:cNvPr id="32" name="TextBox 31"/>
-          <p:cNvSpPr txBox="1"/>
-          <p:nvPr/>
-        </p:nvSpPr>
-        <p:spPr>
-          <a:xfrm>
-            <a:off x="987552" y="6480810"/>
-            <a:ext cx="5734385" cy="402336"/>
-          </a:xfrm>
-          <a:prstGeom prst="rect">
-            <a:avLst/>
-          </a:prstGeom>
-          <a:noFill/>
-        </p:spPr>
-        <p:txBody>
-          <a:bodyPr wrap="square" lIns="0" tIns="0" rIns="0" bIns="0" anchor="t">
-            <a:spAutoFit/>
-          </a:bodyPr>
-          <a:lstStyle/>
-          <a:p>
-            <a:pPr algn="l">
-              <a:lnSpc>
-                <a:spcPct val="132000"/>
-              </a:lnSpc>
-            </a:pPr>
-            <a:r>
-              <a:rPr sz="2400" b="0" i="0" u="none">
-                <a:solidFill>
-                  <a:srgbClr val="18181B"/>
-                </a:solidFill>
-                <a:latin typeface="Arial"/>
-              </a:rPr>
-              <a:t>Current Lane C loses</a:t>
-            </a:r>
-          </a:p>
-        </p:txBody>
-      </p:sp>
-      <p:sp>
-        <p:nvSpPr>
-          <p:cNvPr id="33" name="rule"/>
-          <p:cNvSpPr/>
-          <p:nvPr/>
-        </p:nvSpPr>
-        <p:spPr>
-          <a:xfrm>
-            <a:off x="6913961" y="6243066"/>
-            <a:ext cx="3504346" cy="10972"/>
-          </a:xfrm>
-          <a:prstGeom prst="rect">
-            <a:avLst/>
-          </a:prstGeom>
-          <a:solidFill>
-            <a:srgbClr val="E4E4E7"/>
-          </a:solidFill>
-          <a:ln>
-            <a:noFill/>
-          </a:ln>
-          <a:effectLst/>
-        </p:spPr>
-        <p:style>
-          <a:lnRef idx="1">
-            <a:schemeClr val="accent1"/>
-          </a:lnRef>
-          <a:fillRef idx="3">
-            <a:schemeClr val="accent1"/>
-          </a:fillRef>
-          <a:effectRef idx="2">
-            <a:schemeClr val="accent1"/>
-          </a:effectRef>
-          <a:fontRef idx="minor">
-            <a:schemeClr val="lt1"/>
-          </a:fontRef>
-        </p:style>
-        <p:txBody>
-          <a:bodyPr rtlCol="0" anchor="ctr"/>
-          <a:lstStyle/>
-          <a:p>
-            <a:pPr algn="ctr"/>
-            <a:endParaRPr/>
-          </a:p>
-        </p:txBody>
-      </p:sp>
-      <p:sp>
-        <p:nvSpPr>
-          <p:cNvPr id="34" name="TextBox 33"/>
-          <p:cNvSpPr txBox="1"/>
-          <p:nvPr/>
-        </p:nvSpPr>
-        <p:spPr>
-          <a:xfrm>
-            <a:off x="6913961" y="6480810"/>
-            <a:ext cx="3504346" cy="326898"/>
-          </a:xfrm>
-          <a:prstGeom prst="rect">
-            <a:avLst/>
-          </a:prstGeom>
-          <a:noFill/>
-        </p:spPr>
-        <p:txBody>
-          <a:bodyPr wrap="square" lIns="0" tIns="0" rIns="0" bIns="0" anchor="t">
-            <a:spAutoFit/>
-          </a:bodyPr>
-          <a:lstStyle/>
-          <a:p>
-            <a:pPr algn="l">
-              <a:lnSpc>
-                <a:spcPct val="132000"/>
-              </a:lnSpc>
-            </a:pPr>
-            <a:r>
-              <a:rPr sz="1950" b="0" i="0" u="none">
-                <a:solidFill>
-                  <a:srgbClr val="52525B"/>
-                </a:solidFill>
-                <a:latin typeface="Arial"/>
-              </a:rPr>
-              <a:t>Screening</a:t>
-            </a:r>
-          </a:p>
-        </p:txBody>
-      </p:sp>
-      <p:sp>
-        <p:nvSpPr>
-          <p:cNvPr id="35" name="rule"/>
-          <p:cNvSpPr/>
-          <p:nvPr/>
-        </p:nvSpPr>
-        <p:spPr>
-          <a:xfrm>
-            <a:off x="10610331" y="6243066"/>
-            <a:ext cx="6690116" cy="10972"/>
-          </a:xfrm>
-          <a:prstGeom prst="rect">
-            <a:avLst/>
-          </a:prstGeom>
-          <a:solidFill>
-            <a:srgbClr val="E4E4E7"/>
-          </a:solidFill>
-          <a:ln>
-            <a:noFill/>
-          </a:ln>
-          <a:effectLst/>
-        </p:spPr>
-        <p:style>
-          <a:lnRef idx="1">
-            <a:schemeClr val="accent1"/>
-          </a:lnRef>
-          <a:fillRef idx="3">
-            <a:schemeClr val="accent1"/>
-          </a:fillRef>
-          <a:effectRef idx="2">
-            <a:schemeClr val="accent1"/>
-          </a:effectRef>
-          <a:fontRef idx="minor">
-            <a:schemeClr val="lt1"/>
-          </a:fontRef>
-        </p:style>
-        <p:txBody>
-          <a:bodyPr rtlCol="0" anchor="ctr"/>
-          <a:lstStyle/>
-          <a:p>
-            <a:pPr algn="ctr"/>
-            <a:endParaRPr/>
-          </a:p>
-        </p:txBody>
-      </p:sp>
-      <p:sp>
-        <p:nvSpPr>
-          <p:cNvPr id="36" name="TextBox 35"/>
-          <p:cNvSpPr txBox="1"/>
-          <p:nvPr/>
-        </p:nvSpPr>
-        <p:spPr>
-          <a:xfrm>
-            <a:off x="10610331" y="6480810"/>
-            <a:ext cx="6690116" cy="326898"/>
-          </a:xfrm>
-          <a:prstGeom prst="rect">
-            <a:avLst/>
-          </a:prstGeom>
-          <a:noFill/>
-        </p:spPr>
-        <p:txBody>
-          <a:bodyPr wrap="square" lIns="0" tIns="0" rIns="0" bIns="0" anchor="t">
-            <a:spAutoFit/>
-          </a:bodyPr>
-          <a:lstStyle/>
-          <a:p>
-            <a:pPr algn="l">
-              <a:lnSpc>
-                <a:spcPct val="132000"/>
-              </a:lnSpc>
-            </a:pPr>
-            <a:r>
-              <a:rPr sz="1950" b="0" i="0" u="none">
-                <a:solidFill>
-                  <a:srgbClr val="52525B"/>
-                </a:solidFill>
-                <a:latin typeface="Arial"/>
-              </a:rPr>
-              <a:t>S6a path; exact port pending</a:t>
-            </a:r>
-          </a:p>
-        </p:txBody>
-      </p:sp>
-      <p:sp>
-        <p:nvSpPr>
-          <p:cNvPr id="37" name="rule"/>
-          <p:cNvSpPr/>
-          <p:nvPr/>
-        </p:nvSpPr>
-        <p:spPr>
-          <a:xfrm>
-            <a:off x="987552" y="7066026"/>
-            <a:ext cx="5734385" cy="10972"/>
-          </a:xfrm>
-          <a:prstGeom prst="rect">
-            <a:avLst/>
-          </a:prstGeom>
-          <a:solidFill>
-            <a:srgbClr val="E4E4E7"/>
-          </a:solidFill>
-          <a:ln>
-            <a:noFill/>
-          </a:ln>
-          <a:effectLst/>
-        </p:spPr>
-        <p:style>
-          <a:lnRef idx="1">
-            <a:schemeClr val="accent1"/>
-          </a:lnRef>
-          <a:fillRef idx="3">
-            <a:schemeClr val="accent1"/>
-          </a:fillRef>
-          <a:effectRef idx="2">
-            <a:schemeClr val="accent1"/>
-          </a:effectRef>
-          <a:fontRef idx="minor">
-            <a:schemeClr val="lt1"/>
-          </a:fontRef>
-        </p:style>
-        <p:txBody>
-          <a:bodyPr rtlCol="0" anchor="ctr"/>
-          <a:lstStyle/>
-          <a:p>
-            <a:pPr algn="ctr"/>
-            <a:endParaRPr/>
-          </a:p>
-        </p:txBody>
-      </p:sp>
-      <p:sp>
-        <p:nvSpPr>
-          <p:cNvPr id="38" name="TextBox 37"/>
-          <p:cNvSpPr txBox="1"/>
-          <p:nvPr/>
-        </p:nvSpPr>
-        <p:spPr>
-          <a:xfrm>
-            <a:off x="987552" y="7303770"/>
-            <a:ext cx="5734385" cy="402336"/>
-          </a:xfrm>
-          <a:prstGeom prst="rect">
-            <a:avLst/>
-          </a:prstGeom>
-          <a:noFill/>
-        </p:spPr>
-        <p:txBody>
-          <a:bodyPr wrap="square" lIns="0" tIns="0" rIns="0" bIns="0" anchor="t">
-            <a:spAutoFit/>
-          </a:bodyPr>
-          <a:lstStyle/>
-          <a:p>
-            <a:pPr algn="l">
-              <a:lnSpc>
-                <a:spcPct val="132000"/>
-              </a:lnSpc>
-            </a:pPr>
-            <a:r>
-              <a:rPr sz="2400" b="0" i="0" u="none">
-                <a:solidFill>
-                  <a:srgbClr val="18181B"/>
-                </a:solidFill>
-                <a:latin typeface="Arial"/>
-              </a:rPr>
-              <a:t>Full eviction round trip favors B</a:t>
-            </a:r>
-          </a:p>
-        </p:txBody>
-      </p:sp>
-      <p:sp>
-        <p:nvSpPr>
-          <p:cNvPr id="39" name="rule"/>
-          <p:cNvSpPr/>
-          <p:nvPr/>
-        </p:nvSpPr>
-        <p:spPr>
-          <a:xfrm>
-            <a:off x="6913961" y="7066026"/>
-            <a:ext cx="3504346" cy="10972"/>
-          </a:xfrm>
-          <a:prstGeom prst="rect">
-            <a:avLst/>
-          </a:prstGeom>
-          <a:solidFill>
-            <a:srgbClr val="E4E4E7"/>
-          </a:solidFill>
-          <a:ln>
-            <a:noFill/>
-          </a:ln>
-          <a:effectLst/>
-        </p:spPr>
-        <p:style>
-          <a:lnRef idx="1">
-            <a:schemeClr val="accent1"/>
-          </a:lnRef>
-          <a:fillRef idx="3">
-            <a:schemeClr val="accent1"/>
-          </a:fillRef>
-          <a:effectRef idx="2">
-            <a:schemeClr val="accent1"/>
-          </a:effectRef>
-          <a:fontRef idx="minor">
-            <a:schemeClr val="lt1"/>
-          </a:fontRef>
-        </p:style>
-        <p:txBody>
-          <a:bodyPr rtlCol="0" anchor="ctr"/>
-          <a:lstStyle/>
-          <a:p>
-            <a:pPr algn="ctr"/>
-            <a:endParaRPr/>
-          </a:p>
-        </p:txBody>
-      </p:sp>
-      <p:sp>
-        <p:nvSpPr>
-          <p:cNvPr id="40" name="TextBox 39"/>
-          <p:cNvSpPr txBox="1"/>
-          <p:nvPr/>
-        </p:nvSpPr>
-        <p:spPr>
-          <a:xfrm>
-            <a:off x="6913961" y="7303770"/>
-            <a:ext cx="3504346" cy="326898"/>
-          </a:xfrm>
-          <a:prstGeom prst="rect">
-            <a:avLst/>
-          </a:prstGeom>
-          <a:noFill/>
-        </p:spPr>
-        <p:txBody>
-          <a:bodyPr wrap="square" lIns="0" tIns="0" rIns="0" bIns="0" anchor="t">
-            <a:spAutoFit/>
-          </a:bodyPr>
-          <a:lstStyle/>
-          <a:p>
-            <a:pPr algn="l">
-              <a:lnSpc>
-                <a:spcPct val="132000"/>
-              </a:lnSpc>
-            </a:pPr>
-            <a:r>
-              <a:rPr sz="1950" b="0" i="0" u="none">
-                <a:solidFill>
-                  <a:srgbClr val="52525B"/>
-                </a:solidFill>
-                <a:latin typeface="Arial"/>
-              </a:rPr>
-              <a:t>Unknown</a:t>
-            </a:r>
-          </a:p>
-        </p:txBody>
-      </p:sp>
-      <p:sp>
-        <p:nvSpPr>
-          <p:cNvPr id="41" name="rule"/>
-          <p:cNvSpPr/>
-          <p:nvPr/>
-        </p:nvSpPr>
-        <p:spPr>
-          <a:xfrm>
-            <a:off x="10610331" y="7066026"/>
-            <a:ext cx="6690116" cy="10972"/>
-          </a:xfrm>
-          <a:prstGeom prst="rect">
-            <a:avLst/>
-          </a:prstGeom>
-          <a:solidFill>
-            <a:srgbClr val="E4E4E7"/>
-          </a:solidFill>
-          <a:ln>
-            <a:noFill/>
-          </a:ln>
-          <a:effectLst/>
-        </p:spPr>
-        <p:style>
-          <a:lnRef idx="1">
-            <a:schemeClr val="accent1"/>
-          </a:lnRef>
-          <a:fillRef idx="3">
-            <a:schemeClr val="accent1"/>
-          </a:fillRef>
-          <a:effectRef idx="2">
-            <a:schemeClr val="accent1"/>
-          </a:effectRef>
-          <a:fontRef idx="minor">
-            <a:schemeClr val="lt1"/>
-          </a:fontRef>
-        </p:style>
-        <p:txBody>
-          <a:bodyPr rtlCol="0" anchor="ctr"/>
-          <a:lstStyle/>
-          <a:p>
-            <a:pPr algn="ctr"/>
-            <a:endParaRPr/>
-          </a:p>
-        </p:txBody>
-      </p:sp>
-      <p:sp>
-        <p:nvSpPr>
-          <p:cNvPr id="42" name="TextBox 41"/>
-          <p:cNvSpPr txBox="1"/>
-          <p:nvPr/>
-        </p:nvSpPr>
-        <p:spPr>
-          <a:xfrm>
-            <a:off x="10610331" y="7303770"/>
-            <a:ext cx="6690116" cy="326898"/>
-          </a:xfrm>
-          <a:prstGeom prst="rect">
-            <a:avLst/>
-          </a:prstGeom>
-          <a:noFill/>
-        </p:spPr>
-        <p:txBody>
-          <a:bodyPr wrap="square" lIns="0" tIns="0" rIns="0" bIns="0" anchor="t">
-            <a:spAutoFit/>
-          </a:bodyPr>
-          <a:lstStyle/>
-          <a:p>
-            <a:pPr algn="l">
-              <a:lnSpc>
-                <a:spcPct val="132000"/>
-              </a:lnSpc>
-            </a:pPr>
-            <a:r>
-              <a:rPr sz="1950" b="0" i="0" u="none">
-                <a:solidFill>
-                  <a:srgbClr val="52525B"/>
-                </a:solidFill>
-                <a:latin typeface="Arial"/>
-              </a:rPr>
-              <a:t>Decode egress E13 missing</a:t>
+              <a:t>Verify full/partial hits, misses, and eviction end to end against the oracle.</a:t>
             </a:r>
           </a:p>
         </p:txBody>
@@ -4560,7 +3546,7 @@
                 </a:solidFill>
                 <a:latin typeface="Arial"/>
               </a:rPr>
-              <a:t>NEXT MEASUREMENTS</a:t>
+              <a:t>WHAT THE EVIDENCE SUPPORTS</a:t>
             </a:r>
           </a:p>
         </p:txBody>
@@ -4599,21 +3585,138 @@
                 </a:solidFill>
                 <a:latin typeface="Arial"/>
               </a:rPr>
-              <a:t>Only run experiments that can change the decision</a:t>
-            </a:r>
-          </a:p>
-        </p:txBody>
-      </p:sp>
-      <p:sp>
-        <p:nvSpPr>
-          <p:cNvPr id="4" name="rule"/>
+              <a:t>A conditional policy, with explicit gaps</a:t>
+            </a:r>
+          </a:p>
+        </p:txBody>
+      </p:sp>
+      <p:sp>
+        <p:nvSpPr>
+          <p:cNvPr id="4" name="TextBox 3"/>
+          <p:cNvSpPr txBox="1"/>
+          <p:nvPr/>
+        </p:nvSpPr>
+        <p:spPr>
+          <a:xfrm>
+            <a:off x="987552" y="2484882"/>
+            <a:ext cx="5734385" cy="326898"/>
+          </a:xfrm>
+          <a:prstGeom prst="rect">
+            <a:avLst/>
+          </a:prstGeom>
+          <a:noFill/>
+        </p:spPr>
+        <p:txBody>
+          <a:bodyPr wrap="square" lIns="0" tIns="0" rIns="0" bIns="0" anchor="t">
+            <a:spAutoFit/>
+          </a:bodyPr>
+          <a:lstStyle/>
+          <a:p>
+            <a:pPr algn="l">
+              <a:lnSpc>
+                <a:spcPct val="132000"/>
+              </a:lnSpc>
+            </a:pPr>
+            <a:r>
+              <a:rPr sz="1950" b="0" i="0" u="none" spc="150">
+                <a:solidFill>
+                  <a:srgbClr val="A1A1AA"/>
+                </a:solidFill>
+                <a:latin typeface="Arial"/>
+              </a:rPr>
+              <a:t>STATEMENT</a:t>
+            </a:r>
+          </a:p>
+        </p:txBody>
+      </p:sp>
+      <p:sp>
+        <p:nvSpPr>
+          <p:cNvPr id="5" name="TextBox 4"/>
+          <p:cNvSpPr txBox="1"/>
+          <p:nvPr/>
+        </p:nvSpPr>
+        <p:spPr>
+          <a:xfrm>
+            <a:off x="6913961" y="2484882"/>
+            <a:ext cx="3504346" cy="326898"/>
+          </a:xfrm>
+          <a:prstGeom prst="rect">
+            <a:avLst/>
+          </a:prstGeom>
+          <a:noFill/>
+        </p:spPr>
+        <p:txBody>
+          <a:bodyPr wrap="square" lIns="0" tIns="0" rIns="0" bIns="0" anchor="t">
+            <a:spAutoFit/>
+          </a:bodyPr>
+          <a:lstStyle/>
+          <a:p>
+            <a:pPr algn="l">
+              <a:lnSpc>
+                <a:spcPct val="132000"/>
+              </a:lnSpc>
+            </a:pPr>
+            <a:r>
+              <a:rPr sz="1950" b="0" i="0" u="none" spc="150">
+                <a:solidFill>
+                  <a:srgbClr val="A1A1AA"/>
+                </a:solidFill>
+                <a:latin typeface="Arial"/>
+              </a:rPr>
+              <a:t>EVIDENCE STRENGTH</a:t>
+            </a:r>
+          </a:p>
+        </p:txBody>
+      </p:sp>
+      <p:sp>
+        <p:nvSpPr>
+          <p:cNvPr id="6" name="TextBox 5"/>
+          <p:cNvSpPr txBox="1"/>
+          <p:nvPr/>
+        </p:nvSpPr>
+        <p:spPr>
+          <a:xfrm>
+            <a:off x="10610331" y="2484882"/>
+            <a:ext cx="6690116" cy="326898"/>
+          </a:xfrm>
+          <a:prstGeom prst="rect">
+            <a:avLst/>
+          </a:prstGeom>
+          <a:noFill/>
+        </p:spPr>
+        <p:txBody>
+          <a:bodyPr wrap="square" lIns="0" tIns="0" rIns="0" bIns="0" anchor="t">
+            <a:spAutoFit/>
+          </a:bodyPr>
+          <a:lstStyle/>
+          <a:p>
+            <a:pPr algn="l">
+              <a:lnSpc>
+                <a:spcPct val="132000"/>
+              </a:lnSpc>
+            </a:pPr>
+            <a:r>
+              <a:rPr sz="1950" b="0" i="0" u="none" spc="150">
+                <a:solidFill>
+                  <a:srgbClr val="A1A1AA"/>
+                </a:solidFill>
+                <a:latin typeface="Arial"/>
+              </a:rPr>
+              <a:t>SCOPE / CAVEAT</a:t>
+            </a:r>
+          </a:p>
+        </p:txBody>
+      </p:sp>
+      <p:sp>
+        <p:nvSpPr>
+          <p:cNvPr id="7" name="rule"/>
           <p:cNvSpPr/>
           <p:nvPr/>
         </p:nvSpPr>
         <p:spPr>
           <a:xfrm>
-            <a:off x="987552" y="2484882"/>
-            <a:ext cx="14282928" cy="10972"/>
+            <a:off x="987552" y="2951226"/>
+            <a:ext cx="5734385" cy="10972"/>
           </a:xfrm>
           <a:prstGeom prst="rect">
             <a:avLst/>
@@ -4651,14 +3754,14 @@
       </p:sp>
       <p:sp>
         <p:nvSpPr>
-          <p:cNvPr id="5" name="TextBox 4"/>
+          <p:cNvPr id="8" name="TextBox 7"/>
           <p:cNvSpPr txBox="1"/>
           <p:nvPr/>
         </p:nvSpPr>
         <p:spPr>
           <a:xfrm>
-            <a:off x="987552" y="2740913"/>
-            <a:ext cx="2093976" cy="326898"/>
+            <a:off x="987552" y="3188970"/>
+            <a:ext cx="5734385" cy="402336"/>
           </a:xfrm>
           <a:prstGeom prst="rect">
             <a:avLst/>
@@ -4677,66 +3780,27 @@
               </a:lnSpc>
             </a:pPr>
             <a:r>
-              <a:rPr sz="1950" b="0" i="0" u="none">
-                <a:solidFill>
-                  <a:srgbClr val="A1A1AA"/>
-                </a:solidFill>
-                <a:latin typeface="Arial"/>
-              </a:rPr>
-              <a:t>E14</a:t>
-            </a:r>
-          </a:p>
-        </p:txBody>
-      </p:sp>
-      <p:sp>
-        <p:nvSpPr>
-          <p:cNvPr id="6" name="TextBox 5"/>
-          <p:cNvSpPr txBox="1"/>
-          <p:nvPr/>
-        </p:nvSpPr>
-        <p:spPr>
-          <a:xfrm>
-            <a:off x="3200400" y="2704337"/>
-            <a:ext cx="10972800" cy="402336"/>
-          </a:xfrm>
-          <a:prstGeom prst="rect">
-            <a:avLst/>
-          </a:prstGeom>
-          <a:noFill/>
-        </p:spPr>
-        <p:txBody>
-          <a:bodyPr wrap="square" lIns="0" tIns="0" rIns="0" bIns="0" anchor="t">
-            <a:spAutoFit/>
-          </a:bodyPr>
-          <a:lstStyle/>
-          <a:p>
-            <a:pPr algn="l">
-              <a:lnSpc>
-                <a:spcPct val="132000"/>
-              </a:lnSpc>
-            </a:pPr>
-            <a:r>
               <a:rPr sz="2400" b="0" i="0" u="none">
                 <a:solidFill>
                   <a:srgbClr val="18181B"/>
                 </a:solidFill>
                 <a:latin typeface="Arial"/>
               </a:rPr>
-              <a:t>Add a same-PE first-Z timestamp; separate readiness from first-token fill.</a:t>
-            </a:r>
-          </a:p>
-        </p:txBody>
-      </p:sp>
-      <p:sp>
-        <p:nvSpPr>
-          <p:cNvPr id="7" name="rule"/>
+              <a:t>Ingress has a ~46 ms floor</a:t>
+            </a:r>
+          </a:p>
+        </p:txBody>
+      </p:sp>
+      <p:sp>
+        <p:nvSpPr>
+          <p:cNvPr id="9" name="rule"/>
           <p:cNvSpPr/>
           <p:nvPr/>
         </p:nvSpPr>
         <p:spPr>
           <a:xfrm>
-            <a:off x="987552" y="3316986"/>
-            <a:ext cx="14282928" cy="10972"/>
+            <a:off x="6913961" y="2951226"/>
+            <a:ext cx="3504346" cy="10972"/>
           </a:xfrm>
           <a:prstGeom prst="rect">
             <a:avLst/>
@@ -4774,14 +3838,14 @@
       </p:sp>
       <p:sp>
         <p:nvSpPr>
-          <p:cNvPr id="8" name="TextBox 7"/>
+          <p:cNvPr id="10" name="TextBox 9"/>
           <p:cNvSpPr txBox="1"/>
           <p:nvPr/>
         </p:nvSpPr>
         <p:spPr>
           <a:xfrm>
-            <a:off x="987552" y="3573018"/>
-            <a:ext cx="2093976" cy="326898"/>
+            <a:off x="6913961" y="3188970"/>
+            <a:ext cx="3504346" cy="326898"/>
           </a:xfrm>
           <a:prstGeom prst="rect">
             <a:avLst/>
@@ -4802,64 +3866,25 @@
             <a:r>
               <a:rPr sz="1950" b="0" i="0" u="none">
                 <a:solidFill>
-                  <a:srgbClr val="A1A1AA"/>
-                </a:solidFill>
-                <a:latin typeface="Arial"/>
-              </a:rPr>
-              <a:t>E14</a:t>
-            </a:r>
-          </a:p>
-        </p:txBody>
-      </p:sp>
-      <p:sp>
-        <p:nvSpPr>
-          <p:cNvPr id="9" name="TextBox 8"/>
-          <p:cNvSpPr txBox="1"/>
-          <p:nvPr/>
-        </p:nvSpPr>
-        <p:spPr>
-          <a:xfrm>
-            <a:off x="3200400" y="3536441"/>
-            <a:ext cx="10972800" cy="402336"/>
-          </a:xfrm>
-          <a:prstGeom prst="rect">
-            <a:avLst/>
-          </a:prstGeom>
-          <a:noFill/>
-        </p:spPr>
-        <p:txBody>
-          <a:bodyPr wrap="square" lIns="0" tIns="0" rIns="0" bIns="0" anchor="t">
-            <a:spAutoFit/>
-          </a:bodyPr>
-          <a:lstStyle/>
-          <a:p>
-            <a:pPr algn="l">
-              <a:lnSpc>
-                <a:spcPct val="132000"/>
-              </a:lnSpc>
-            </a:pPr>
-            <a:r>
-              <a:rPr sz="2400" b="0" i="0" u="none">
-                <a:solidFill>
-                  <a:srgbClr val="18181B"/>
-                </a:solidFill>
-                <a:latin typeface="Arial"/>
-              </a:rPr>
-              <a:t>Sweep F={1,16,32,64,128,256}, alternate order, and obtain n=2.</a:t>
-            </a:r>
-          </a:p>
-        </p:txBody>
-      </p:sp>
-      <p:sp>
-        <p:nvSpPr>
-          <p:cNvPr id="10" name="rule"/>
+                  <a:srgbClr val="52525B"/>
+                </a:solidFill>
+                <a:latin typeface="Arial"/>
+              </a:rPr>
+              <a:t>Direct measured</a:t>
+            </a:r>
+          </a:p>
+        </p:txBody>
+      </p:sp>
+      <p:sp>
+        <p:nvSpPr>
+          <p:cNvPr id="11" name="rule"/>
           <p:cNvSpPr/>
           <p:nvPr/>
         </p:nvSpPr>
         <p:spPr>
           <a:xfrm>
-            <a:off x="987552" y="4149089"/>
-            <a:ext cx="14282928" cy="10972"/>
+            <a:off x="10610331" y="2951226"/>
+            <a:ext cx="6690116" cy="10972"/>
           </a:xfrm>
           <a:prstGeom prst="rect">
             <a:avLst/>
@@ -4897,14 +3922,14 @@
       </p:sp>
       <p:sp>
         <p:nvSpPr>
-          <p:cNvPr id="11" name="TextBox 10"/>
+          <p:cNvPr id="12" name="TextBox 11"/>
           <p:cNvSpPr txBox="1"/>
           <p:nvPr/>
         </p:nvSpPr>
         <p:spPr>
           <a:xfrm>
-            <a:off x="987552" y="4405122"/>
-            <a:ext cx="2093976" cy="326898"/>
+            <a:off x="10610331" y="3188970"/>
+            <a:ext cx="6690116" cy="326898"/>
           </a:xfrm>
           <a:prstGeom prst="rect">
             <a:avLst/>
@@ -4925,50 +3950,11 @@
             <a:r>
               <a:rPr sz="1950" b="0" i="0" u="none">
                 <a:solidFill>
-                  <a:srgbClr val="A1A1AA"/>
-                </a:solidFill>
-                <a:latin typeface="Arial"/>
-              </a:rPr>
-              <a:t>E10</a:t>
-            </a:r>
-          </a:p>
-        </p:txBody>
-      </p:sp>
-      <p:sp>
-        <p:nvSpPr>
-          <p:cNvPr id="12" name="TextBox 11"/>
-          <p:cNvSpPr txBox="1"/>
-          <p:nvPr/>
-        </p:nvSpPr>
-        <p:spPr>
-          <a:xfrm>
-            <a:off x="3200400" y="4368546"/>
-            <a:ext cx="10972800" cy="402336"/>
-          </a:xfrm>
-          <a:prstGeom prst="rect">
-            <a:avLst/>
-          </a:prstGeom>
-          <a:noFill/>
-        </p:spPr>
-        <p:txBody>
-          <a:bodyPr wrap="square" lIns="0" tIns="0" rIns="0" bIns="0" anchor="t">
-            <a:spAutoFit/>
-          </a:bodyPr>
-          <a:lstStyle/>
-          <a:p>
-            <a:pPr algn="l">
-              <a:lnSpc>
-                <a:spcPct val="132000"/>
-              </a:lnSpc>
-            </a:pPr>
-            <a:r>
-              <a:rPr sz="2400" b="0" i="0" u="none">
-                <a:solidFill>
-                  <a:srgbClr val="18181B"/>
-                </a:solidFill>
-                <a:latin typeface="Arial"/>
-              </a:rPr>
-              <a:t>Directly witness S=1024 and S=4096 boundary neighborhoods.</a:t>
+                  <a:srgbClr val="52525B"/>
+                </a:solidFill>
+                <a:latin typeface="Arial"/>
+              </a:rPr>
+              <a:t>pdSeparate decode ingress</a:t>
             </a:r>
           </a:p>
         </p:txBody>
@@ -4981,8 +3967,8 @@
         </p:nvSpPr>
         <p:spPr>
           <a:xfrm>
-            <a:off x="987552" y="4981194"/>
-            <a:ext cx="14282928" cy="10972"/>
+            <a:off x="987552" y="3774186"/>
+            <a:ext cx="5734385" cy="10972"/>
           </a:xfrm>
           <a:prstGeom prst="rect">
             <a:avLst/>
@@ -5026,8 +4012,8 @@
         </p:nvSpPr>
         <p:spPr>
           <a:xfrm>
-            <a:off x="987552" y="5237226"/>
-            <a:ext cx="2093976" cy="326898"/>
+            <a:off x="987552" y="4011930"/>
+            <a:ext cx="5734385" cy="402336"/>
           </a:xfrm>
           <a:prstGeom prst="rect">
             <a:avLst/>
@@ -5046,66 +4032,27 @@
               </a:lnSpc>
             </a:pPr>
             <a:r>
-              <a:rPr sz="1950" b="0" i="0" u="none">
-                <a:solidFill>
-                  <a:srgbClr val="A1A1AA"/>
-                </a:solidFill>
-                <a:latin typeface="Arial"/>
-              </a:rPr>
-              <a:t>E12a</a:t>
-            </a:r>
-          </a:p>
-        </p:txBody>
-      </p:sp>
-      <p:sp>
-        <p:nvSpPr>
-          <p:cNvPr id="15" name="TextBox 14"/>
-          <p:cNvSpPr txBox="1"/>
-          <p:nvPr/>
-        </p:nvSpPr>
-        <p:spPr>
-          <a:xfrm>
-            <a:off x="3200400" y="5200650"/>
-            <a:ext cx="10972800" cy="402336"/>
-          </a:xfrm>
-          <a:prstGeom prst="rect">
-            <a:avLst/>
-          </a:prstGeom>
-          <a:noFill/>
-        </p:spPr>
-        <p:txBody>
-          <a:bodyPr wrap="square" lIns="0" tIns="0" rIns="0" bIns="0" anchor="t">
-            <a:spAutoFit/>
-          </a:bodyPr>
-          <a:lstStyle/>
-          <a:p>
-            <a:pPr algn="l">
-              <a:lnSpc>
-                <a:spcPct val="132000"/>
-              </a:lnSpc>
-            </a:pPr>
-            <a:r>
               <a:rPr sz="2400" b="0" i="0" u="none">
                 <a:solidFill>
                   <a:srgbClr val="18181B"/>
                 </a:solidFill>
                 <a:latin typeface="Arial"/>
               </a:rPr>
-              <a:t>Port to exact pdSeparate only if final confirmation is required.</a:t>
-            </a:r>
-          </a:p>
-        </p:txBody>
-      </p:sp>
-      <p:sp>
-        <p:nvSpPr>
-          <p:cNvPr id="16" name="rule"/>
+              <a:t>Forced steady cost grows with position</a:t>
+            </a:r>
+          </a:p>
+        </p:txBody>
+      </p:sp>
+      <p:sp>
+        <p:nvSpPr>
+          <p:cNvPr id="15" name="rule"/>
           <p:cNvSpPr/>
           <p:nvPr/>
         </p:nvSpPr>
         <p:spPr>
           <a:xfrm>
-            <a:off x="987552" y="5813298"/>
-            <a:ext cx="14282928" cy="10972"/>
+            <a:off x="6913961" y="3774186"/>
+            <a:ext cx="3504346" cy="10972"/>
           </a:xfrm>
           <a:prstGeom prst="rect">
             <a:avLst/>
@@ -5143,14 +4090,14 @@
       </p:sp>
       <p:sp>
         <p:nvSpPr>
-          <p:cNvPr id="17" name="TextBox 16"/>
+          <p:cNvPr id="16" name="TextBox 15"/>
           <p:cNvSpPr txBox="1"/>
           <p:nvPr/>
         </p:nvSpPr>
         <p:spPr>
           <a:xfrm>
-            <a:off x="987552" y="6069330"/>
-            <a:ext cx="2093976" cy="326898"/>
+            <a:off x="6913961" y="4011930"/>
+            <a:ext cx="3504346" cy="326898"/>
           </a:xfrm>
           <a:prstGeom prst="rect">
             <a:avLst/>
@@ -5171,12 +4118,57 @@
             <a:r>
               <a:rPr sz="1950" b="0" i="0" u="none">
                 <a:solidFill>
-                  <a:srgbClr val="A1A1AA"/>
-                </a:solidFill>
-                <a:latin typeface="Arial"/>
-              </a:rPr>
-              <a:t>E13</a:t>
-            </a:r>
+                  <a:srgbClr val="52525B"/>
+                </a:solidFill>
+                <a:latin typeface="Arial"/>
+              </a:rPr>
+              <a:t>Measured + fit</a:t>
+            </a:r>
+          </a:p>
+        </p:txBody>
+      </p:sp>
+      <p:sp>
+        <p:nvSpPr>
+          <p:cNvPr id="17" name="rule"/>
+          <p:cNvSpPr/>
+          <p:nvPr/>
+        </p:nvSpPr>
+        <p:spPr>
+          <a:xfrm>
+            <a:off x="10610331" y="3774186"/>
+            <a:ext cx="6690116" cy="10972"/>
+          </a:xfrm>
+          <a:prstGeom prst="rect">
+            <a:avLst/>
+          </a:prstGeom>
+          <a:solidFill>
+            <a:srgbClr val="E4E4E7"/>
+          </a:solidFill>
+          <a:ln>
+            <a:noFill/>
+          </a:ln>
+          <a:effectLst/>
+        </p:spPr>
+        <p:style>
+          <a:lnRef idx="1">
+            <a:schemeClr val="accent1"/>
+          </a:lnRef>
+          <a:fillRef idx="3">
+            <a:schemeClr val="accent1"/>
+          </a:fillRef>
+          <a:effectRef idx="2">
+            <a:schemeClr val="accent1"/>
+          </a:effectRef>
+          <a:fontRef idx="minor">
+            <a:schemeClr val="lt1"/>
+          </a:fontRef>
+        </p:style>
+        <p:txBody>
+          <a:bodyPr rtlCol="0" anchor="ctr"/>
+          <a:lstStyle/>
+          <a:p>
+            <a:pPr algn="ctr"/>
+            <a:endParaRPr/>
           </a:p>
         </p:txBody>
       </p:sp>
@@ -5188,8 +4180,8 @@
         </p:nvSpPr>
         <p:spPr>
           <a:xfrm>
-            <a:off x="3200400" y="6032754"/>
-            <a:ext cx="10972800" cy="402336"/>
+            <a:off x="10610331" y="4011930"/>
+            <a:ext cx="6690116" cy="326898"/>
           </a:xfrm>
           <a:prstGeom prst="rect">
             <a:avLst/>
@@ -5208,13 +4200,1021 @@
               </a:lnSpc>
             </a:pPr>
             <a:r>
+              <a:rPr sz="1950" b="0" i="0" u="none">
+                <a:solidFill>
+                  <a:srgbClr val="52525B"/>
+                </a:solidFill>
+                <a:latin typeface="Arial"/>
+              </a:rPr>
+              <a:t>16 E14 steady segments</a:t>
+            </a:r>
+          </a:p>
+        </p:txBody>
+      </p:sp>
+      <p:sp>
+        <p:nvSpPr>
+          <p:cNvPr id="19" name="rule"/>
+          <p:cNvSpPr/>
+          <p:nvPr/>
+        </p:nvSpPr>
+        <p:spPr>
+          <a:xfrm>
+            <a:off x="987552" y="4597146"/>
+            <a:ext cx="5734385" cy="10972"/>
+          </a:xfrm>
+          <a:prstGeom prst="rect">
+            <a:avLst/>
+          </a:prstGeom>
+          <a:solidFill>
+            <a:srgbClr val="E4E4E7"/>
+          </a:solidFill>
+          <a:ln>
+            <a:noFill/>
+          </a:ln>
+          <a:effectLst/>
+        </p:spPr>
+        <p:style>
+          <a:lnRef idx="1">
+            <a:schemeClr val="accent1"/>
+          </a:lnRef>
+          <a:fillRef idx="3">
+            <a:schemeClr val="accent1"/>
+          </a:fillRef>
+          <a:effectRef idx="2">
+            <a:schemeClr val="accent1"/>
+          </a:effectRef>
+          <a:fontRef idx="minor">
+            <a:schemeClr val="lt1"/>
+          </a:fontRef>
+        </p:style>
+        <p:txBody>
+          <a:bodyPr rtlCol="0" anchor="ctr"/>
+          <a:lstStyle/>
+          <a:p>
+            <a:pPr algn="ctr"/>
+            <a:endParaRPr/>
+          </a:p>
+        </p:txBody>
+      </p:sp>
+      <p:sp>
+        <p:nvSpPr>
+          <p:cNvPr id="20" name="TextBox 19"/>
+          <p:cNvSpPr txBox="1"/>
+          <p:nvPr/>
+        </p:nvSpPr>
+        <p:spPr>
+          <a:xfrm>
+            <a:off x="987552" y="4834890"/>
+            <a:ext cx="5734385" cy="402336"/>
+          </a:xfrm>
+          <a:prstGeom prst="rect">
+            <a:avLst/>
+          </a:prstGeom>
+          <a:noFill/>
+        </p:spPr>
+        <p:txBody>
+          <a:bodyPr wrap="square" lIns="0" tIns="0" rIns="0" bIns="0" anchor="t">
+            <a:spAutoFit/>
+          </a:bodyPr>
+          <a:lstStyle/>
+          <a:p>
+            <a:pPr algn="l">
+              <a:lnSpc>
+                <a:spcPct val="132000"/>
+              </a:lnSpc>
+            </a:pPr>
+            <a:r>
               <a:rPr sz="2400" b="0" i="0" u="none">
                 <a:solidFill>
                   <a:srgbClr val="18181B"/>
                 </a:solidFill>
                 <a:latin typeface="Arial"/>
               </a:rPr>
-              <a:t>Decide whether full eviction round-trip latency is required for the policy claim.</a:t>
+              <a:t>A/B winner flips at 512→1024</a:t>
+            </a:r>
+          </a:p>
+        </p:txBody>
+      </p:sp>
+      <p:sp>
+        <p:nvSpPr>
+          <p:cNvPr id="21" name="rule"/>
+          <p:cNvSpPr/>
+          <p:nvPr/>
+        </p:nvSpPr>
+        <p:spPr>
+          <a:xfrm>
+            <a:off x="6913961" y="4597146"/>
+            <a:ext cx="3504346" cy="10972"/>
+          </a:xfrm>
+          <a:prstGeom prst="rect">
+            <a:avLst/>
+          </a:prstGeom>
+          <a:solidFill>
+            <a:srgbClr val="E4E4E7"/>
+          </a:solidFill>
+          <a:ln>
+            <a:noFill/>
+          </a:ln>
+          <a:effectLst/>
+        </p:spPr>
+        <p:style>
+          <a:lnRef idx="1">
+            <a:schemeClr val="accent1"/>
+          </a:lnRef>
+          <a:fillRef idx="3">
+            <a:schemeClr val="accent1"/>
+          </a:fillRef>
+          <a:effectRef idx="2">
+            <a:schemeClr val="accent1"/>
+          </a:effectRef>
+          <a:fontRef idx="minor">
+            <a:schemeClr val="lt1"/>
+          </a:fontRef>
+        </p:style>
+        <p:txBody>
+          <a:bodyPr rtlCol="0" anchor="ctr"/>
+          <a:lstStyle/>
+          <a:p>
+            <a:pPr algn="ctr"/>
+            <a:endParaRPr/>
+          </a:p>
+        </p:txBody>
+      </p:sp>
+      <p:sp>
+        <p:nvSpPr>
+          <p:cNvPr id="22" name="TextBox 21"/>
+          <p:cNvSpPr txBox="1"/>
+          <p:nvPr/>
+        </p:nvSpPr>
+        <p:spPr>
+          <a:xfrm>
+            <a:off x="6913961" y="4834890"/>
+            <a:ext cx="3504346" cy="326898"/>
+          </a:xfrm>
+          <a:prstGeom prst="rect">
+            <a:avLst/>
+          </a:prstGeom>
+          <a:noFill/>
+        </p:spPr>
+        <p:txBody>
+          <a:bodyPr wrap="square" lIns="0" tIns="0" rIns="0" bIns="0" anchor="t">
+            <a:spAutoFit/>
+          </a:bodyPr>
+          <a:lstStyle/>
+          <a:p>
+            <a:pPr algn="l">
+              <a:lnSpc>
+                <a:spcPct val="132000"/>
+              </a:lnSpc>
+            </a:pPr>
+            <a:r>
+              <a:rPr sz="1950" b="0" i="0" u="none">
+                <a:solidFill>
+                  <a:srgbClr val="52525B"/>
+                </a:solidFill>
+                <a:latin typeface="Arial"/>
+              </a:rPr>
+              <a:t>Direct measured</a:t>
+            </a:r>
+          </a:p>
+        </p:txBody>
+      </p:sp>
+      <p:sp>
+        <p:nvSpPr>
+          <p:cNvPr id="23" name="rule"/>
+          <p:cNvSpPr/>
+          <p:nvPr/>
+        </p:nvSpPr>
+        <p:spPr>
+          <a:xfrm>
+            <a:off x="10610331" y="4597146"/>
+            <a:ext cx="6690116" cy="10972"/>
+          </a:xfrm>
+          <a:prstGeom prst="rect">
+            <a:avLst/>
+          </a:prstGeom>
+          <a:solidFill>
+            <a:srgbClr val="E4E4E7"/>
+          </a:solidFill>
+          <a:ln>
+            <a:noFill/>
+          </a:ln>
+          <a:effectLst/>
+        </p:spPr>
+        <p:style>
+          <a:lnRef idx="1">
+            <a:schemeClr val="accent1"/>
+          </a:lnRef>
+          <a:fillRef idx="3">
+            <a:schemeClr val="accent1"/>
+          </a:fillRef>
+          <a:effectRef idx="2">
+            <a:schemeClr val="accent1"/>
+          </a:effectRef>
+          <a:fontRef idx="minor">
+            <a:schemeClr val="lt1"/>
+          </a:fontRef>
+        </p:style>
+        <p:txBody>
+          <a:bodyPr rtlCol="0" anchor="ctr"/>
+          <a:lstStyle/>
+          <a:p>
+            <a:pPr algn="ctr"/>
+            <a:endParaRPr/>
+          </a:p>
+        </p:txBody>
+      </p:sp>
+      <p:sp>
+        <p:nvSpPr>
+          <p:cNvPr id="24" name="TextBox 23"/>
+          <p:cNvSpPr txBox="1"/>
+          <p:nvPr/>
+        </p:nvSpPr>
+        <p:spPr>
+          <a:xfrm>
+            <a:off x="10610331" y="4834890"/>
+            <a:ext cx="6690116" cy="326898"/>
+          </a:xfrm>
+          <a:prstGeom prst="rect">
+            <a:avLst/>
+          </a:prstGeom>
+          <a:noFill/>
+        </p:spPr>
+        <p:txBody>
+          <a:bodyPr wrap="square" lIns="0" tIns="0" rIns="0" bIns="0" anchor="t">
+            <a:spAutoFit/>
+          </a:bodyPr>
+          <a:lstStyle/>
+          <a:p>
+            <a:pPr algn="l">
+              <a:lnSpc>
+                <a:spcPct val="132000"/>
+              </a:lnSpc>
+            </a:pPr>
+            <a:r>
+              <a:rPr sz="1950" b="0" i="0" u="none">
+                <a:solidFill>
+                  <a:srgbClr val="52525B"/>
+                </a:solidFill>
+                <a:latin typeface="Arial"/>
+              </a:rPr>
+              <a:t>Lnew=256 resume setting</a:t>
+            </a:r>
+          </a:p>
+        </p:txBody>
+      </p:sp>
+      <p:sp>
+        <p:nvSpPr>
+          <p:cNvPr id="25" name="rule"/>
+          <p:cNvSpPr/>
+          <p:nvPr/>
+        </p:nvSpPr>
+        <p:spPr>
+          <a:xfrm>
+            <a:off x="987552" y="5420106"/>
+            <a:ext cx="5734385" cy="10972"/>
+          </a:xfrm>
+          <a:prstGeom prst="rect">
+            <a:avLst/>
+          </a:prstGeom>
+          <a:solidFill>
+            <a:srgbClr val="E4E4E7"/>
+          </a:solidFill>
+          <a:ln>
+            <a:noFill/>
+          </a:ln>
+          <a:effectLst/>
+        </p:spPr>
+        <p:style>
+          <a:lnRef idx="1">
+            <a:schemeClr val="accent1"/>
+          </a:lnRef>
+          <a:fillRef idx="3">
+            <a:schemeClr val="accent1"/>
+          </a:fillRef>
+          <a:effectRef idx="2">
+            <a:schemeClr val="accent1"/>
+          </a:effectRef>
+          <a:fontRef idx="minor">
+            <a:schemeClr val="lt1"/>
+          </a:fontRef>
+        </p:style>
+        <p:txBody>
+          <a:bodyPr rtlCol="0" anchor="ctr"/>
+          <a:lstStyle/>
+          <a:p>
+            <a:pPr algn="ctr"/>
+            <a:endParaRPr/>
+          </a:p>
+        </p:txBody>
+      </p:sp>
+      <p:sp>
+        <p:nvSpPr>
+          <p:cNvPr id="26" name="TextBox 25"/>
+          <p:cNvSpPr txBox="1"/>
+          <p:nvPr/>
+        </p:nvSpPr>
+        <p:spPr>
+          <a:xfrm>
+            <a:off x="987552" y="5657850"/>
+            <a:ext cx="5734385" cy="402336"/>
+          </a:xfrm>
+          <a:prstGeom prst="rect">
+            <a:avLst/>
+          </a:prstGeom>
+          <a:noFill/>
+        </p:spPr>
+        <p:txBody>
+          <a:bodyPr wrap="square" lIns="0" tIns="0" rIns="0" bIns="0" anchor="t">
+            <a:spAutoFit/>
+          </a:bodyPr>
+          <a:lstStyle/>
+          <a:p>
+            <a:pPr algn="l">
+              <a:lnSpc>
+                <a:spcPct val="132000"/>
+              </a:lnSpc>
+            </a:pPr>
+            <a:r>
+              <a:rPr sz="2400" b="0" i="0" u="none">
+                <a:solidFill>
+                  <a:srgbClr val="18181B"/>
+                </a:solidFill>
+                <a:latin typeface="Arial"/>
+              </a:rPr>
+              <a:t>Crossing moves with S and reload policy</a:t>
+            </a:r>
+          </a:p>
+        </p:txBody>
+      </p:sp>
+      <p:sp>
+        <p:nvSpPr>
+          <p:cNvPr id="27" name="rule"/>
+          <p:cNvSpPr/>
+          <p:nvPr/>
+        </p:nvSpPr>
+        <p:spPr>
+          <a:xfrm>
+            <a:off x="6913961" y="5420106"/>
+            <a:ext cx="3504346" cy="10972"/>
+          </a:xfrm>
+          <a:prstGeom prst="rect">
+            <a:avLst/>
+          </a:prstGeom>
+          <a:solidFill>
+            <a:srgbClr val="E4E4E7"/>
+          </a:solidFill>
+          <a:ln>
+            <a:noFill/>
+          </a:ln>
+          <a:effectLst/>
+        </p:spPr>
+        <p:style>
+          <a:lnRef idx="1">
+            <a:schemeClr val="accent1"/>
+          </a:lnRef>
+          <a:fillRef idx="3">
+            <a:schemeClr val="accent1"/>
+          </a:fillRef>
+          <a:effectRef idx="2">
+            <a:schemeClr val="accent1"/>
+          </a:effectRef>
+          <a:fontRef idx="minor">
+            <a:schemeClr val="lt1"/>
+          </a:fontRef>
+        </p:style>
+        <p:txBody>
+          <a:bodyPr rtlCol="0" anchor="ctr"/>
+          <a:lstStyle/>
+          <a:p>
+            <a:pPr algn="ctr"/>
+            <a:endParaRPr/>
+          </a:p>
+        </p:txBody>
+      </p:sp>
+      <p:sp>
+        <p:nvSpPr>
+          <p:cNvPr id="28" name="TextBox 27"/>
+          <p:cNvSpPr txBox="1"/>
+          <p:nvPr/>
+        </p:nvSpPr>
+        <p:spPr>
+          <a:xfrm>
+            <a:off x="6913961" y="5657850"/>
+            <a:ext cx="3504346" cy="326898"/>
+          </a:xfrm>
+          <a:prstGeom prst="rect">
+            <a:avLst/>
+          </a:prstGeom>
+          <a:noFill/>
+        </p:spPr>
+        <p:txBody>
+          <a:bodyPr wrap="square" lIns="0" tIns="0" rIns="0" bIns="0" anchor="t">
+            <a:spAutoFit/>
+          </a:bodyPr>
+          <a:lstStyle/>
+          <a:p>
+            <a:pPr algn="l">
+              <a:lnSpc>
+                <a:spcPct val="132000"/>
+              </a:lnSpc>
+            </a:pPr>
+            <a:r>
+              <a:rPr sz="1950" b="0" i="0" u="none">
+                <a:solidFill>
+                  <a:srgbClr val="52525B"/>
+                </a:solidFill>
+                <a:latin typeface="Arial"/>
+              </a:rPr>
+              <a:t>Model-derived</a:t>
+            </a:r>
+          </a:p>
+        </p:txBody>
+      </p:sp>
+      <p:sp>
+        <p:nvSpPr>
+          <p:cNvPr id="29" name="rule"/>
+          <p:cNvSpPr/>
+          <p:nvPr/>
+        </p:nvSpPr>
+        <p:spPr>
+          <a:xfrm>
+            <a:off x="10610331" y="5420106"/>
+            <a:ext cx="6690116" cy="10972"/>
+          </a:xfrm>
+          <a:prstGeom prst="rect">
+            <a:avLst/>
+          </a:prstGeom>
+          <a:solidFill>
+            <a:srgbClr val="E4E4E7"/>
+          </a:solidFill>
+          <a:ln>
+            <a:noFill/>
+          </a:ln>
+          <a:effectLst/>
+        </p:spPr>
+        <p:style>
+          <a:lnRef idx="1">
+            <a:schemeClr val="accent1"/>
+          </a:lnRef>
+          <a:fillRef idx="3">
+            <a:schemeClr val="accent1"/>
+          </a:fillRef>
+          <a:effectRef idx="2">
+            <a:schemeClr val="accent1"/>
+          </a:effectRef>
+          <a:fontRef idx="minor">
+            <a:schemeClr val="lt1"/>
+          </a:fontRef>
+        </p:style>
+        <p:txBody>
+          <a:bodyPr rtlCol="0" anchor="ctr"/>
+          <a:lstStyle/>
+          <a:p>
+            <a:pPr algn="ctr"/>
+            <a:endParaRPr/>
+          </a:p>
+        </p:txBody>
+      </p:sp>
+      <p:sp>
+        <p:nvSpPr>
+          <p:cNvPr id="30" name="TextBox 29"/>
+          <p:cNvSpPr txBox="1"/>
+          <p:nvPr/>
+        </p:nvSpPr>
+        <p:spPr>
+          <a:xfrm>
+            <a:off x="10610331" y="5657850"/>
+            <a:ext cx="6690116" cy="326898"/>
+          </a:xfrm>
+          <a:prstGeom prst="rect">
+            <a:avLst/>
+          </a:prstGeom>
+          <a:noFill/>
+        </p:spPr>
+        <p:txBody>
+          <a:bodyPr wrap="square" lIns="0" tIns="0" rIns="0" bIns="0" anchor="t">
+            <a:spAutoFit/>
+          </a:bodyPr>
+          <a:lstStyle/>
+          <a:p>
+            <a:pPr algn="l">
+              <a:lnSpc>
+                <a:spcPct val="132000"/>
+              </a:lnSpc>
+            </a:pPr>
+            <a:r>
+              <a:rPr sz="1950" b="0" i="0" u="none">
+                <a:solidFill>
+                  <a:srgbClr val="52525B"/>
+                </a:solidFill>
+                <a:latin typeface="Arial"/>
+              </a:rPr>
+              <a:t>Direct witnesses pending</a:t>
+            </a:r>
+          </a:p>
+        </p:txBody>
+      </p:sp>
+      <p:sp>
+        <p:nvSpPr>
+          <p:cNvPr id="31" name="rule"/>
+          <p:cNvSpPr/>
+          <p:nvPr/>
+        </p:nvSpPr>
+        <p:spPr>
+          <a:xfrm>
+            <a:off x="987552" y="6243066"/>
+            <a:ext cx="5734385" cy="10972"/>
+          </a:xfrm>
+          <a:prstGeom prst="rect">
+            <a:avLst/>
+          </a:prstGeom>
+          <a:solidFill>
+            <a:srgbClr val="E4E4E7"/>
+          </a:solidFill>
+          <a:ln>
+            <a:noFill/>
+          </a:ln>
+          <a:effectLst/>
+        </p:spPr>
+        <p:style>
+          <a:lnRef idx="1">
+            <a:schemeClr val="accent1"/>
+          </a:lnRef>
+          <a:fillRef idx="3">
+            <a:schemeClr val="accent1"/>
+          </a:fillRef>
+          <a:effectRef idx="2">
+            <a:schemeClr val="accent1"/>
+          </a:effectRef>
+          <a:fontRef idx="minor">
+            <a:schemeClr val="lt1"/>
+          </a:fontRef>
+        </p:style>
+        <p:txBody>
+          <a:bodyPr rtlCol="0" anchor="ctr"/>
+          <a:lstStyle/>
+          <a:p>
+            <a:pPr algn="ctr"/>
+            <a:endParaRPr/>
+          </a:p>
+        </p:txBody>
+      </p:sp>
+      <p:sp>
+        <p:nvSpPr>
+          <p:cNvPr id="32" name="TextBox 31"/>
+          <p:cNvSpPr txBox="1"/>
+          <p:nvPr/>
+        </p:nvSpPr>
+        <p:spPr>
+          <a:xfrm>
+            <a:off x="987552" y="6480810"/>
+            <a:ext cx="5734385" cy="402336"/>
+          </a:xfrm>
+          <a:prstGeom prst="rect">
+            <a:avLst/>
+          </a:prstGeom>
+          <a:noFill/>
+        </p:spPr>
+        <p:txBody>
+          <a:bodyPr wrap="square" lIns="0" tIns="0" rIns="0" bIns="0" anchor="t">
+            <a:spAutoFit/>
+          </a:bodyPr>
+          <a:lstStyle/>
+          <a:p>
+            <a:pPr algn="l">
+              <a:lnSpc>
+                <a:spcPct val="132000"/>
+              </a:lnSpc>
+            </a:pPr>
+            <a:r>
+              <a:rPr sz="2400" b="0" i="0" u="none">
+                <a:solidFill>
+                  <a:srgbClr val="18181B"/>
+                </a:solidFill>
+                <a:latin typeface="Arial"/>
+              </a:rPr>
+              <a:t>Current Lane C loses</a:t>
+            </a:r>
+          </a:p>
+        </p:txBody>
+      </p:sp>
+      <p:sp>
+        <p:nvSpPr>
+          <p:cNvPr id="33" name="rule"/>
+          <p:cNvSpPr/>
+          <p:nvPr/>
+        </p:nvSpPr>
+        <p:spPr>
+          <a:xfrm>
+            <a:off x="6913961" y="6243066"/>
+            <a:ext cx="3504346" cy="10972"/>
+          </a:xfrm>
+          <a:prstGeom prst="rect">
+            <a:avLst/>
+          </a:prstGeom>
+          <a:solidFill>
+            <a:srgbClr val="E4E4E7"/>
+          </a:solidFill>
+          <a:ln>
+            <a:noFill/>
+          </a:ln>
+          <a:effectLst/>
+        </p:spPr>
+        <p:style>
+          <a:lnRef idx="1">
+            <a:schemeClr val="accent1"/>
+          </a:lnRef>
+          <a:fillRef idx="3">
+            <a:schemeClr val="accent1"/>
+          </a:fillRef>
+          <a:effectRef idx="2">
+            <a:schemeClr val="accent1"/>
+          </a:effectRef>
+          <a:fontRef idx="minor">
+            <a:schemeClr val="lt1"/>
+          </a:fontRef>
+        </p:style>
+        <p:txBody>
+          <a:bodyPr rtlCol="0" anchor="ctr"/>
+          <a:lstStyle/>
+          <a:p>
+            <a:pPr algn="ctr"/>
+            <a:endParaRPr/>
+          </a:p>
+        </p:txBody>
+      </p:sp>
+      <p:sp>
+        <p:nvSpPr>
+          <p:cNvPr id="34" name="TextBox 33"/>
+          <p:cNvSpPr txBox="1"/>
+          <p:nvPr/>
+        </p:nvSpPr>
+        <p:spPr>
+          <a:xfrm>
+            <a:off x="6913961" y="6480810"/>
+            <a:ext cx="3504346" cy="326898"/>
+          </a:xfrm>
+          <a:prstGeom prst="rect">
+            <a:avLst/>
+          </a:prstGeom>
+          <a:noFill/>
+        </p:spPr>
+        <p:txBody>
+          <a:bodyPr wrap="square" lIns="0" tIns="0" rIns="0" bIns="0" anchor="t">
+            <a:spAutoFit/>
+          </a:bodyPr>
+          <a:lstStyle/>
+          <a:p>
+            <a:pPr algn="l">
+              <a:lnSpc>
+                <a:spcPct val="132000"/>
+              </a:lnSpc>
+            </a:pPr>
+            <a:r>
+              <a:rPr sz="1950" b="0" i="0" u="none">
+                <a:solidFill>
+                  <a:srgbClr val="52525B"/>
+                </a:solidFill>
+                <a:latin typeface="Arial"/>
+              </a:rPr>
+              <a:t>Screening</a:t>
+            </a:r>
+          </a:p>
+        </p:txBody>
+      </p:sp>
+      <p:sp>
+        <p:nvSpPr>
+          <p:cNvPr id="35" name="rule"/>
+          <p:cNvSpPr/>
+          <p:nvPr/>
+        </p:nvSpPr>
+        <p:spPr>
+          <a:xfrm>
+            <a:off x="10610331" y="6243066"/>
+            <a:ext cx="6690116" cy="10972"/>
+          </a:xfrm>
+          <a:prstGeom prst="rect">
+            <a:avLst/>
+          </a:prstGeom>
+          <a:solidFill>
+            <a:srgbClr val="E4E4E7"/>
+          </a:solidFill>
+          <a:ln>
+            <a:noFill/>
+          </a:ln>
+          <a:effectLst/>
+        </p:spPr>
+        <p:style>
+          <a:lnRef idx="1">
+            <a:schemeClr val="accent1"/>
+          </a:lnRef>
+          <a:fillRef idx="3">
+            <a:schemeClr val="accent1"/>
+          </a:fillRef>
+          <a:effectRef idx="2">
+            <a:schemeClr val="accent1"/>
+          </a:effectRef>
+          <a:fontRef idx="minor">
+            <a:schemeClr val="lt1"/>
+          </a:fontRef>
+        </p:style>
+        <p:txBody>
+          <a:bodyPr rtlCol="0" anchor="ctr"/>
+          <a:lstStyle/>
+          <a:p>
+            <a:pPr algn="ctr"/>
+            <a:endParaRPr/>
+          </a:p>
+        </p:txBody>
+      </p:sp>
+      <p:sp>
+        <p:nvSpPr>
+          <p:cNvPr id="36" name="TextBox 35"/>
+          <p:cNvSpPr txBox="1"/>
+          <p:nvPr/>
+        </p:nvSpPr>
+        <p:spPr>
+          <a:xfrm>
+            <a:off x="10610331" y="6480810"/>
+            <a:ext cx="6690116" cy="326898"/>
+          </a:xfrm>
+          <a:prstGeom prst="rect">
+            <a:avLst/>
+          </a:prstGeom>
+          <a:noFill/>
+        </p:spPr>
+        <p:txBody>
+          <a:bodyPr wrap="square" lIns="0" tIns="0" rIns="0" bIns="0" anchor="t">
+            <a:spAutoFit/>
+          </a:bodyPr>
+          <a:lstStyle/>
+          <a:p>
+            <a:pPr algn="l">
+              <a:lnSpc>
+                <a:spcPct val="132000"/>
+              </a:lnSpc>
+            </a:pPr>
+            <a:r>
+              <a:rPr sz="1950" b="0" i="0" u="none">
+                <a:solidFill>
+                  <a:srgbClr val="52525B"/>
+                </a:solidFill>
+                <a:latin typeface="Arial"/>
+              </a:rPr>
+              <a:t>S6a path; exact port pending</a:t>
+            </a:r>
+          </a:p>
+        </p:txBody>
+      </p:sp>
+      <p:sp>
+        <p:nvSpPr>
+          <p:cNvPr id="37" name="rule"/>
+          <p:cNvSpPr/>
+          <p:nvPr/>
+        </p:nvSpPr>
+        <p:spPr>
+          <a:xfrm>
+            <a:off x="987552" y="7066026"/>
+            <a:ext cx="5734385" cy="10972"/>
+          </a:xfrm>
+          <a:prstGeom prst="rect">
+            <a:avLst/>
+          </a:prstGeom>
+          <a:solidFill>
+            <a:srgbClr val="E4E4E7"/>
+          </a:solidFill>
+          <a:ln>
+            <a:noFill/>
+          </a:ln>
+          <a:effectLst/>
+        </p:spPr>
+        <p:style>
+          <a:lnRef idx="1">
+            <a:schemeClr val="accent1"/>
+          </a:lnRef>
+          <a:fillRef idx="3">
+            <a:schemeClr val="accent1"/>
+          </a:fillRef>
+          <a:effectRef idx="2">
+            <a:schemeClr val="accent1"/>
+          </a:effectRef>
+          <a:fontRef idx="minor">
+            <a:schemeClr val="lt1"/>
+          </a:fontRef>
+        </p:style>
+        <p:txBody>
+          <a:bodyPr rtlCol="0" anchor="ctr"/>
+          <a:lstStyle/>
+          <a:p>
+            <a:pPr algn="ctr"/>
+            <a:endParaRPr/>
+          </a:p>
+        </p:txBody>
+      </p:sp>
+      <p:sp>
+        <p:nvSpPr>
+          <p:cNvPr id="38" name="TextBox 37"/>
+          <p:cNvSpPr txBox="1"/>
+          <p:nvPr/>
+        </p:nvSpPr>
+        <p:spPr>
+          <a:xfrm>
+            <a:off x="987552" y="7303770"/>
+            <a:ext cx="5734385" cy="402336"/>
+          </a:xfrm>
+          <a:prstGeom prst="rect">
+            <a:avLst/>
+          </a:prstGeom>
+          <a:noFill/>
+        </p:spPr>
+        <p:txBody>
+          <a:bodyPr wrap="square" lIns="0" tIns="0" rIns="0" bIns="0" anchor="t">
+            <a:spAutoFit/>
+          </a:bodyPr>
+          <a:lstStyle/>
+          <a:p>
+            <a:pPr algn="l">
+              <a:lnSpc>
+                <a:spcPct val="132000"/>
+              </a:lnSpc>
+            </a:pPr>
+            <a:r>
+              <a:rPr sz="2400" b="0" i="0" u="none">
+                <a:solidFill>
+                  <a:srgbClr val="18181B"/>
+                </a:solidFill>
+                <a:latin typeface="Arial"/>
+              </a:rPr>
+              <a:t>Full eviction round trip favors B</a:t>
+            </a:r>
+          </a:p>
+        </p:txBody>
+      </p:sp>
+      <p:sp>
+        <p:nvSpPr>
+          <p:cNvPr id="39" name="rule"/>
+          <p:cNvSpPr/>
+          <p:nvPr/>
+        </p:nvSpPr>
+        <p:spPr>
+          <a:xfrm>
+            <a:off x="6913961" y="7066026"/>
+            <a:ext cx="3504346" cy="10972"/>
+          </a:xfrm>
+          <a:prstGeom prst="rect">
+            <a:avLst/>
+          </a:prstGeom>
+          <a:solidFill>
+            <a:srgbClr val="E4E4E7"/>
+          </a:solidFill>
+          <a:ln>
+            <a:noFill/>
+          </a:ln>
+          <a:effectLst/>
+        </p:spPr>
+        <p:style>
+          <a:lnRef idx="1">
+            <a:schemeClr val="accent1"/>
+          </a:lnRef>
+          <a:fillRef idx="3">
+            <a:schemeClr val="accent1"/>
+          </a:fillRef>
+          <a:effectRef idx="2">
+            <a:schemeClr val="accent1"/>
+          </a:effectRef>
+          <a:fontRef idx="minor">
+            <a:schemeClr val="lt1"/>
+          </a:fontRef>
+        </p:style>
+        <p:txBody>
+          <a:bodyPr rtlCol="0" anchor="ctr"/>
+          <a:lstStyle/>
+          <a:p>
+            <a:pPr algn="ctr"/>
+            <a:endParaRPr/>
+          </a:p>
+        </p:txBody>
+      </p:sp>
+      <p:sp>
+        <p:nvSpPr>
+          <p:cNvPr id="40" name="TextBox 39"/>
+          <p:cNvSpPr txBox="1"/>
+          <p:nvPr/>
+        </p:nvSpPr>
+        <p:spPr>
+          <a:xfrm>
+            <a:off x="6913961" y="7303770"/>
+            <a:ext cx="3504346" cy="326898"/>
+          </a:xfrm>
+          <a:prstGeom prst="rect">
+            <a:avLst/>
+          </a:prstGeom>
+          <a:noFill/>
+        </p:spPr>
+        <p:txBody>
+          <a:bodyPr wrap="square" lIns="0" tIns="0" rIns="0" bIns="0" anchor="t">
+            <a:spAutoFit/>
+          </a:bodyPr>
+          <a:lstStyle/>
+          <a:p>
+            <a:pPr algn="l">
+              <a:lnSpc>
+                <a:spcPct val="132000"/>
+              </a:lnSpc>
+            </a:pPr>
+            <a:r>
+              <a:rPr sz="1950" b="0" i="0" u="none">
+                <a:solidFill>
+                  <a:srgbClr val="52525B"/>
+                </a:solidFill>
+                <a:latin typeface="Arial"/>
+              </a:rPr>
+              <a:t>Unknown</a:t>
+            </a:r>
+          </a:p>
+        </p:txBody>
+      </p:sp>
+      <p:sp>
+        <p:nvSpPr>
+          <p:cNvPr id="41" name="rule"/>
+          <p:cNvSpPr/>
+          <p:nvPr/>
+        </p:nvSpPr>
+        <p:spPr>
+          <a:xfrm>
+            <a:off x="10610331" y="7066026"/>
+            <a:ext cx="6690116" cy="10972"/>
+          </a:xfrm>
+          <a:prstGeom prst="rect">
+            <a:avLst/>
+          </a:prstGeom>
+          <a:solidFill>
+            <a:srgbClr val="E4E4E7"/>
+          </a:solidFill>
+          <a:ln>
+            <a:noFill/>
+          </a:ln>
+          <a:effectLst/>
+        </p:spPr>
+        <p:style>
+          <a:lnRef idx="1">
+            <a:schemeClr val="accent1"/>
+          </a:lnRef>
+          <a:fillRef idx="3">
+            <a:schemeClr val="accent1"/>
+          </a:fillRef>
+          <a:effectRef idx="2">
+            <a:schemeClr val="accent1"/>
+          </a:effectRef>
+          <a:fontRef idx="minor">
+            <a:schemeClr val="lt1"/>
+          </a:fontRef>
+        </p:style>
+        <p:txBody>
+          <a:bodyPr rtlCol="0" anchor="ctr"/>
+          <a:lstStyle/>
+          <a:p>
+            <a:pPr algn="ctr"/>
+            <a:endParaRPr/>
+          </a:p>
+        </p:txBody>
+      </p:sp>
+      <p:sp>
+        <p:nvSpPr>
+          <p:cNvPr id="42" name="TextBox 41"/>
+          <p:cNvSpPr txBox="1"/>
+          <p:nvPr/>
+        </p:nvSpPr>
+        <p:spPr>
+          <a:xfrm>
+            <a:off x="10610331" y="7303770"/>
+            <a:ext cx="6690116" cy="326898"/>
+          </a:xfrm>
+          <a:prstGeom prst="rect">
+            <a:avLst/>
+          </a:prstGeom>
+          <a:noFill/>
+        </p:spPr>
+        <p:txBody>
+          <a:bodyPr wrap="square" lIns="0" tIns="0" rIns="0" bIns="0" anchor="t">
+            <a:spAutoFit/>
+          </a:bodyPr>
+          <a:lstStyle/>
+          <a:p>
+            <a:pPr algn="l">
+              <a:lnSpc>
+                <a:spcPct val="132000"/>
+              </a:lnSpc>
+            </a:pPr>
+            <a:r>
+              <a:rPr sz="1950" b="0" i="0" u="none">
+                <a:solidFill>
+                  <a:srgbClr val="52525B"/>
+                </a:solidFill>
+                <a:latin typeface="Arial"/>
+              </a:rPr>
+              <a:t>Decode egress E13 missing</a:t>
             </a:r>
           </a:p>
         </p:txBody>
@@ -5228,7 +5228,7 @@
 </file>
 
 <file path=ppt/slides/slide17.xml><?xml version="1.0" encoding="utf-8"?>
-<p:sld xmlns:a="http://schemas.openxmlformats.org/drawingml/2006/main" xmlns:p="http://schemas.openxmlformats.org/presentationml/2006/main" xmlns:r="http://schemas.openxmlformats.org/officeDocument/2006/relationships">
+<p:sld xmlns:a="http://schemas.openxmlformats.org/drawingml/2006/main" xmlns:r="http://schemas.openxmlformats.org/officeDocument/2006/relationships" xmlns:p="http://schemas.openxmlformats.org/presentationml/2006/main">
   <p:cSld>
     <p:spTree>
       <p:nvGrpSpPr>
@@ -5236,7 +5236,14 @@
         <p:cNvGrpSpPr/>
         <p:nvPr/>
       </p:nvGrpSpPr>
-      <p:grpSpPr/>
+      <p:grpSpPr>
+        <a:xfrm>
+          <a:off x="0" y="0"/>
+          <a:ext cx="0" cy="0"/>
+          <a:chOff x="0" y="0"/>
+          <a:chExt cx="0" cy="0"/>
+        </a:xfrm>
+      </p:grpSpPr>
       <p:sp>
         <p:nvSpPr>
           <p:cNvPr id="2" name="TextBox 1"/>
@@ -5254,7 +5261,7 @@
           <a:noFill/>
         </p:spPr>
         <p:txBody>
-          <a:bodyPr wrap="square" lIns="0" rIns="0" tIns="0" bIns="0" anchor="t">
+          <a:bodyPr wrap="square" lIns="0" tIns="0" rIns="0" bIns="0" anchor="t">
             <a:spAutoFit/>
           </a:bodyPr>
           <a:lstStyle/>
@@ -5265,13 +5272,13 @@
               </a:lnSpc>
             </a:pPr>
             <a:r>
-              <a:rPr sz="1800" b="0" u="none" i="0" spc="150">
+              <a:rPr sz="1800" b="0" i="0" u="none" spc="150">
                 <a:solidFill>
                   <a:srgbClr val="A1A1AA"/>
                 </a:solidFill>
                 <a:latin typeface="Arial"/>
               </a:rPr>
-              <a:t>MILESTONE CURSOR</a:t>
+              <a:t>NEXT MEASUREMENTS</a:t>
             </a:r>
           </a:p>
         </p:txBody>
@@ -5293,7 +5300,7 @@
           <a:noFill/>
         </p:spPr>
         <p:txBody>
-          <a:bodyPr wrap="square" lIns="0" rIns="0" tIns="0" bIns="0" anchor="t">
+          <a:bodyPr wrap="square" lIns="0" tIns="0" rIns="0" bIns="0" anchor="t">
             <a:spAutoFit/>
           </a:bodyPr>
           <a:lstStyle/>
@@ -5304,13 +5311,13 @@
               </a:lnSpc>
             </a:pPr>
             <a:r>
-              <a:rPr sz="4500" b="0" u="none" i="0">
+              <a:rPr sz="4500" b="0" i="0" u="none">
                 <a:solidFill>
                   <a:srgbClr val="18181B"/>
                 </a:solidFill>
                 <a:latin typeface="Arial"/>
               </a:rPr>
-              <a:t>Finish M2, then resume M1 from S2</a:t>
+              <a:t>Only run experiments that can change the decision</a:t>
             </a:r>
           </a:p>
         </p:txBody>
@@ -5356,6 +5363,7 @@
           <a:lstStyle/>
           <a:p>
             <a:pPr algn="ctr"/>
+            <a:endParaRPr/>
           </a:p>
         </p:txBody>
       </p:sp>
@@ -5376,7 +5384,7 @@
           <a:noFill/>
         </p:spPr>
         <p:txBody>
-          <a:bodyPr wrap="square" lIns="0" rIns="0" tIns="0" bIns="0" anchor="t">
+          <a:bodyPr wrap="square" lIns="0" tIns="0" rIns="0" bIns="0" anchor="t">
             <a:spAutoFit/>
           </a:bodyPr>
           <a:lstStyle/>
@@ -5387,13 +5395,13 @@
               </a:lnSpc>
             </a:pPr>
             <a:r>
-              <a:rPr sz="1950" b="0" u="none" i="0">
+              <a:rPr sz="1950" b="0" i="0" u="none">
                 <a:solidFill>
                   <a:srgbClr val="A1A1AA"/>
                 </a:solidFill>
                 <a:latin typeface="Arial"/>
               </a:rPr>
-              <a:t>M2 · CLOSE</a:t>
+              <a:t>E14</a:t>
             </a:r>
           </a:p>
         </p:txBody>
@@ -5415,7 +5423,7 @@
           <a:noFill/>
         </p:spPr>
         <p:txBody>
-          <a:bodyPr wrap="square" lIns="0" rIns="0" tIns="0" bIns="0" anchor="t">
+          <a:bodyPr wrap="square" lIns="0" tIns="0" rIns="0" bIns="0" anchor="t">
             <a:spAutoFit/>
           </a:bodyPr>
           <a:lstStyle/>
@@ -5426,13 +5434,13 @@
               </a:lnSpc>
             </a:pPr>
             <a:r>
-              <a:rPr sz="2400" b="0" u="none" i="0">
+              <a:rPr sz="2400" b="0" i="0" u="none">
                 <a:solidFill>
                   <a:srgbClr val="18181B"/>
                 </a:solidFill>
                 <a:latin typeface="Arial"/>
               </a:rPr>
-              <a:t>Reconcile Lane B; close E14/E11 and conditional E13; keep E12 gated.</a:t>
+              <a:t>Add a same-PE first-Z timestamp; separate readiness from first-token fill.</a:t>
             </a:r>
           </a:p>
         </p:txBody>
@@ -5478,6 +5486,7 @@
           <a:lstStyle/>
           <a:p>
             <a:pPr algn="ctr"/>
+            <a:endParaRPr/>
           </a:p>
         </p:txBody>
       </p:sp>
@@ -5498,7 +5507,7 @@
           <a:noFill/>
         </p:spPr>
         <p:txBody>
-          <a:bodyPr wrap="square" lIns="0" rIns="0" tIns="0" bIns="0" anchor="t">
+          <a:bodyPr wrap="square" lIns="0" tIns="0" rIns="0" bIns="0" anchor="t">
             <a:spAutoFit/>
           </a:bodyPr>
           <a:lstStyle/>
@@ -5509,13 +5518,13 @@
               </a:lnSpc>
             </a:pPr>
             <a:r>
-              <a:rPr sz="1950" b="0" u="none" i="0">
+              <a:rPr sz="1950" b="0" i="0" u="none">
                 <a:solidFill>
                   <a:srgbClr val="A1A1AA"/>
                 </a:solidFill>
                 <a:latin typeface="Arial"/>
               </a:rPr>
-              <a:t>M1 · S2 NEXT</a:t>
+              <a:t>E14</a:t>
             </a:r>
           </a:p>
         </p:txBody>
@@ -5537,7 +5546,7 @@
           <a:noFill/>
         </p:spPr>
         <p:txBody>
-          <a:bodyPr wrap="square" lIns="0" rIns="0" tIns="0" bIns="0" anchor="t">
+          <a:bodyPr wrap="square" lIns="0" tIns="0" rIns="0" bIns="0" anchor="t">
             <a:spAutoFit/>
           </a:bodyPr>
           <a:lstStyle/>
@@ -5548,13 +5557,13 @@
               </a:lnSpc>
             </a:pPr>
             <a:r>
-              <a:rPr sz="2400" b="0" u="none" i="0">
+              <a:rPr sz="2400" b="0" i="0" u="none">
                 <a:solidFill>
                   <a:srgbClr val="18181B"/>
                 </a:solidFill>
                 <a:latin typeface="Arial"/>
               </a:rPr>
-              <a:t>Track per-slot valid_len and verify retention as active slots change.</a:t>
+              <a:t>Sweep F={1,16,32,64,128,256}, alternate order, and obtain n=2.</a:t>
             </a:r>
           </a:p>
         </p:txBody>
@@ -5600,6 +5609,7 @@
           <a:lstStyle/>
           <a:p>
             <a:pPr algn="ctr"/>
+            <a:endParaRPr/>
           </a:p>
         </p:txBody>
       </p:sp>
@@ -5620,7 +5630,7 @@
           <a:noFill/>
         </p:spPr>
         <p:txBody>
-          <a:bodyPr wrap="square" lIns="0" rIns="0" tIns="0" bIns="0" anchor="t">
+          <a:bodyPr wrap="square" lIns="0" tIns="0" rIns="0" bIns="0" anchor="t">
             <a:spAutoFit/>
           </a:bodyPr>
           <a:lstStyle/>
@@ -5631,13 +5641,13 @@
               </a:lnSpc>
             </a:pPr>
             <a:r>
-              <a:rPr sz="1950" b="0" u="none" i="0">
+              <a:rPr sz="1950" b="0" i="0" u="none">
                 <a:solidFill>
                   <a:srgbClr val="A1A1AA"/>
                 </a:solidFill>
                 <a:latin typeface="Arial"/>
               </a:rPr>
-              <a:t>M1 · S3</a:t>
+              <a:t>E10</a:t>
             </a:r>
           </a:p>
         </p:txBody>
@@ -5659,7 +5669,7 @@
           <a:noFill/>
         </p:spPr>
         <p:txBody>
-          <a:bodyPr wrap="square" lIns="0" rIns="0" tIns="0" bIns="0" anchor="t">
+          <a:bodyPr wrap="square" lIns="0" tIns="0" rIns="0" bIns="0" anchor="t">
             <a:spAutoFit/>
           </a:bodyPr>
           <a:lstStyle/>
@@ -5670,13 +5680,13 @@
               </a:lnSpc>
             </a:pPr>
             <a:r>
-              <a:rPr sz="2400" b="0" u="none" i="0">
+              <a:rPr sz="2400" b="0" i="0" u="none">
                 <a:solidFill>
                   <a:srgbClr val="18181B"/>
                 </a:solidFill>
                 <a:latin typeface="Arial"/>
               </a:rPr>
-              <a:t>Implement prefix hits, skip-prefill, LRU replace, miss rebuild, and truncation.</a:t>
+              <a:t>Directly witness S=1024 and S=4096 boundary neighborhoods.</a:t>
             </a:r>
           </a:p>
         </p:txBody>
@@ -5722,6 +5732,7 @@
           <a:lstStyle/>
           <a:p>
             <a:pPr algn="ctr"/>
+            <a:endParaRPr/>
           </a:p>
         </p:txBody>
       </p:sp>
@@ -5742,7 +5753,7 @@
           <a:noFill/>
         </p:spPr>
         <p:txBody>
-          <a:bodyPr wrap="square" lIns="0" rIns="0" tIns="0" bIns="0" anchor="t">
+          <a:bodyPr wrap="square" lIns="0" tIns="0" rIns="0" bIns="0" anchor="t">
             <a:spAutoFit/>
           </a:bodyPr>
           <a:lstStyle/>
@@ -5753,13 +5764,13 @@
               </a:lnSpc>
             </a:pPr>
             <a:r>
-              <a:rPr sz="1950" b="0" u="none" i="0">
+              <a:rPr sz="1950" b="0" i="0" u="none">
                 <a:solidFill>
                   <a:srgbClr val="A1A1AA"/>
                 </a:solidFill>
                 <a:latin typeface="Arial"/>
               </a:rPr>
-              <a:t>M1 · S4</a:t>
+              <a:t>E12a</a:t>
             </a:r>
           </a:p>
         </p:txBody>
@@ -5781,7 +5792,7 @@
           <a:noFill/>
         </p:spPr>
         <p:txBody>
-          <a:bodyPr wrap="square" lIns="0" rIns="0" tIns="0" bIns="0" anchor="t">
+          <a:bodyPr wrap="square" lIns="0" tIns="0" rIns="0" bIns="0" anchor="t">
             <a:spAutoFit/>
           </a:bodyPr>
           <a:lstStyle/>
@@ -5792,13 +5803,13 @@
               </a:lnSpc>
             </a:pPr>
             <a:r>
-              <a:rPr sz="2400" b="0" u="none" i="0">
+              <a:rPr sz="2400" b="0" i="0" u="none">
                 <a:solidFill>
                   <a:srgbClr val="18181B"/>
                 </a:solidFill>
                 <a:latin typeface="Arial"/>
               </a:rPr>
-              <a:t>Measure requests per bank near the SRAM limit and addressing overhead.</a:t>
+              <a:t>Port to exact pdSeparate only if final confirmation is required.</a:t>
             </a:r>
           </a:p>
         </p:txBody>
@@ -5844,6 +5855,7 @@
           <a:lstStyle/>
           <a:p>
             <a:pPr algn="ctr"/>
+            <a:endParaRPr/>
           </a:p>
         </p:txBody>
       </p:sp>
@@ -5864,7 +5876,7 @@
           <a:noFill/>
         </p:spPr>
         <p:txBody>
-          <a:bodyPr wrap="square" lIns="0" rIns="0" tIns="0" bIns="0" anchor="t">
+          <a:bodyPr wrap="square" lIns="0" tIns="0" rIns="0" bIns="0" anchor="t">
             <a:spAutoFit/>
           </a:bodyPr>
           <a:lstStyle/>
@@ -5875,13 +5887,13 @@
               </a:lnSpc>
             </a:pPr>
             <a:r>
-              <a:rPr sz="1950" b="0" u="none" i="0">
+              <a:rPr sz="1950" b="0" i="0" u="none">
                 <a:solidFill>
                   <a:srgbClr val="A1A1AA"/>
                 </a:solidFill>
                 <a:latin typeface="Arial"/>
               </a:rPr>
-              <a:t>M1 · S5</a:t>
+              <a:t>E13</a:t>
             </a:r>
           </a:p>
         </p:txBody>
@@ -5903,7 +5915,7 @@
           <a:noFill/>
         </p:spPr>
         <p:txBody>
-          <a:bodyPr wrap="square" lIns="0" rIns="0" tIns="0" bIns="0" anchor="t">
+          <a:bodyPr wrap="square" lIns="0" tIns="0" rIns="0" bIns="0" anchor="t">
             <a:spAutoFit/>
           </a:bodyPr>
           <a:lstStyle/>
@@ -5914,13 +5926,13 @@
               </a:lnSpc>
             </a:pPr>
             <a:r>
-              <a:rPr sz="2400" b="0" u="none" i="0">
+              <a:rPr sz="2400" b="0" i="0" u="none">
                 <a:solidFill>
                   <a:srgbClr val="18181B"/>
                 </a:solidFill>
                 <a:latin typeface="Arial"/>
               </a:rPr>
-              <a:t>Verify full/partial hits, misses, and eviction end to end against the oracle.</a:t>
+              <a:t>Decide whether full eviction round-trip latency is required for the policy claim.</a:t>
             </a:r>
           </a:p>
         </p:txBody>

--- a/projects/WaferEngine-staging/meetings/2026-08-02.pptx
+++ b/projects/WaferEngine-staging/meetings/2026-08-02.pptx
@@ -424,7 +424,7 @@
           <a:lstStyle/>
           <a:p>
             <a:r>
-              <a:t>I(h) is piecewise-linear interpolation over the six E5 anchors. E10 validates that the real reload path reproduces E5 and that post-ingress forced-token cost matches E9 to 0.97–1.00 across H=512…8192.</a:t>
+              <a:t>I(h) is piecewise-linear interpolation over the six E5 anchors. Under the current Lane B contract, host memory already holds the complete target KV, so Lane B has no force-decode term. The older E10 delta-reload fixture is a different mechanism and must not be substituted here.</a:t>
             </a:r>
           </a:p>
         </p:txBody>
@@ -2432,7 +2432,7 @@
                 </a:solidFill>
                 <a:latin typeface="Arial"/>
               </a:rPr>
-              <a:t>Delta reload pays I(H); full-context reload pays I(S+H). Both then force-decode Lnew using the Lane A model at absolute prefix S+H.</a:t>
+              <a:t>Lane B reloads the complete target KV: B=I(S+H+Lnew). The next free-decode token is common to both lanes and excluded.</a:t>
             </a:r>
           </a:p>
         </p:txBody>
